--- a/presentation/AdventureWorks_Soutenance.pptx
+++ b/presentation/AdventureWorks_Soutenance.pptx
@@ -5,7 +5,7 @@
     <p:sldMasterId id="2147483648" r:id="rId1"/>
   </p:sldMasterIdLst>
   <p:notesMasterIdLst>
-    <p:notesMasterId r:id="rId22"/>
+    <p:notesMasterId r:id="rId21"/>
   </p:notesMasterIdLst>
   <p:sldIdLst>
     <p:sldId id="256" r:id="rId2"/>
@@ -24,10 +24,9 @@
     <p:sldId id="269" r:id="rId15"/>
     <p:sldId id="284" r:id="rId16"/>
     <p:sldId id="271" r:id="rId17"/>
-    <p:sldId id="272" r:id="rId18"/>
-    <p:sldId id="273" r:id="rId19"/>
-    <p:sldId id="288" r:id="rId20"/>
-    <p:sldId id="274" r:id="rId21"/>
+    <p:sldId id="273" r:id="rId18"/>
+    <p:sldId id="288" r:id="rId19"/>
+    <p:sldId id="274" r:id="rId20"/>
   </p:sldIdLst>
   <p:sldSz cx="12192000" cy="6858000"/>
   <p:notesSz cx="6858000" cy="12192000"/>
@@ -998,7 +997,7 @@
           <a:p>
             <a:r>
               <a:rPr lang="en-US" dirty="0"/>
-              <a:t>Deuxième modèle : une classification supervisée du risque de rupture. Point méthodologique important : ma première version affichait un F1 de 0,89, mais c'était une fuite de données, car les produits sans stock enregistré étaient automatiquement classés en rupture. Après correction, il reste 151 produits. La régression logistique détecte 11 ruptures sur 12, avec beaucoup de fausses alertes : elle est utilisable comme filtre d'alerte, pas comme prédiction fine. L'échantillon reste petit, il faut interpréter ces scores avec prudence.</a:t>
+              <a:t>Je veux être transparente sur les limites. La plus importante : la marge est calculée au coût standard, fixe. J'ai essayé d'intégrer la nomenclature BillOfMaterials pour calculer un coût matière réel par vélo, mais les achats sont exprimés en cartons et la nomenclature en unités, sans facteur de conversion : le résultat était inexploitable. Avec ces données supplémentaires, on pourrait relier directement le prix des composants à la marge des vélos.</a:t>
             </a:r>
           </a:p>
         </p:txBody>
@@ -1085,7 +1084,7 @@
           <a:p>
             <a:r>
               <a:rPr lang="en-US" dirty="0"/>
-              <a:t>Je veux être transparente sur les limites. La plus importante : la marge est calculée au coût standard, fixe. J'ai essayé d'intégrer la nomenclature BillOfMaterials pour calculer un coût matière réel par vélo, mais les achats sont exprimés en cartons et la nomenclature en unités, sans facteur de conversion : le résultat était inexploitable. Avec ces données supplémentaires, on pourrait relier directement le prix des composants à la marge des vélos.</a:t>
+              <a:t>Merci pour votre attention. Je suis disponible pour vos questions, et je peux rouvrir le dashboard si vous souhaitez voir un point en détail.</a:t>
             </a:r>
           </a:p>
         </p:txBody>
@@ -1107,94 +1106,7 @@
           <a:p>
             <a:fld id="{F7021451-1387-4CA6-816F-3879F97B5CBC}" type="slidenum">
               <a:rPr lang="en-US"/>
-              <a:t>18</a:t>
-            </a:fld>
-            <a:endParaRPr lang="en-US"/>
-          </a:p>
-        </p:txBody>
-      </p:sp>
-    </p:spTree>
-    <p:extLst>
-      <p:ext uri="{BB962C8B-B14F-4D97-AF65-F5344CB8AC3E}">
-        <p14:creationId xmlns:p14="http://schemas.microsoft.com/office/powerpoint/2010/main" val="1024086991"/>
-      </p:ext>
-    </p:extLst>
-  </p:cSld>
-  <p:clrMapOvr>
-    <a:masterClrMapping/>
-  </p:clrMapOvr>
-</p:notes>
-</file>
-
-<file path=ppt/notesSlides/notesSlide19.xml><?xml version="1.0" encoding="utf-8"?>
-<p:notes xmlns:a="http://schemas.openxmlformats.org/drawingml/2006/main" xmlns:r="http://schemas.openxmlformats.org/officeDocument/2006/relationships" xmlns:p="http://schemas.openxmlformats.org/presentationml/2006/main">
-  <p:cSld>
-    <p:spTree>
-      <p:nvGrpSpPr>
-        <p:cNvPr id="1" name=""/>
-        <p:cNvGrpSpPr/>
-        <p:nvPr/>
-      </p:nvGrpSpPr>
-      <p:grpSpPr>
-        <a:xfrm>
-          <a:off x="0" y="0"/>
-          <a:ext cx="0" cy="0"/>
-          <a:chOff x="0" y="0"/>
-          <a:chExt cx="0" cy="0"/>
-        </a:xfrm>
-      </p:grpSpPr>
-      <p:sp>
-        <p:nvSpPr>
-          <p:cNvPr id="2" name="Slide Image Placeholder 1"/>
-          <p:cNvSpPr>
-            <a:spLocks noGrp="1" noRot="1" noChangeAspect="1"/>
-          </p:cNvSpPr>
-          <p:nvPr>
-            <p:ph type="sldImg"/>
-          </p:nvPr>
-        </p:nvSpPr>
-        <p:spPr/>
-      </p:sp>
-      <p:sp>
-        <p:nvSpPr>
-          <p:cNvPr id="3" name="Notes Placeholder 2"/>
-          <p:cNvSpPr>
-            <a:spLocks noGrp="1"/>
-          </p:cNvSpPr>
-          <p:nvPr>
-            <p:ph type="body" idx="1"/>
-          </p:nvPr>
-        </p:nvSpPr>
-        <p:spPr/>
-        <p:txBody>
-          <a:bodyPr/>
-          <a:lstStyle/>
-          <a:p>
-            <a:r>
-              <a:rPr lang="en-US" dirty="0"/>
-              <a:t>Merci pour votre attention. Je suis disponible pour vos questions, et je peux rouvrir le dashboard si vous souhaitez voir un point en détail.</a:t>
-            </a:r>
-          </a:p>
-        </p:txBody>
-      </p:sp>
-      <p:sp>
-        <p:nvSpPr>
-          <p:cNvPr id="4" name="Slide Number Placeholder 3"/>
-          <p:cNvSpPr>
-            <a:spLocks noGrp="1"/>
-          </p:cNvSpPr>
-          <p:nvPr>
-            <p:ph type="sldNum" sz="quarter" idx="10"/>
-          </p:nvPr>
-        </p:nvSpPr>
-        <p:spPr/>
-        <p:txBody>
-          <a:bodyPr/>
-          <a:lstStyle/>
-          <a:p>
-            <a:fld id="{F7021451-1387-4CA6-816F-3879F97B5CBC}" type="slidenum">
-              <a:rPr lang="en-US"/>
-              <a:t>20</a:t>
+              <a:t>19</a:t>
             </a:fld>
             <a:endParaRPr lang="en-US"/>
           </a:p>
@@ -3471,7 +3383,48 @@
                 <a:ea typeface="IBM Plex Sans" pitchFamily="34" charset="-122"/>
                 <a:cs typeface="IBM Plex Sans" pitchFamily="34" charset="-120"/>
               </a:rPr>
-              <a:t>Les 10 premiers fournisseurs pèsent 43 % des achats (27,2 M€), tous du segment « Gros volumes ».</a:t>
+              <a:t>Les 10 premiers fournisseurs </a:t>
+            </a:r>
+            <a:r>
+              <a:rPr lang="en-US" sz="1400" dirty="0" err="1">
+                <a:solidFill>
+                  <a:srgbClr val="4A5A61"/>
+                </a:solidFill>
+                <a:latin typeface="IBM Plex Sans" pitchFamily="34" charset="0"/>
+                <a:ea typeface="IBM Plex Sans" pitchFamily="34" charset="-122"/>
+                <a:cs typeface="IBM Plex Sans" pitchFamily="34" charset="-120"/>
+              </a:rPr>
+              <a:t>pèsent</a:t>
+            </a:r>
+            <a:r>
+              <a:rPr lang="en-US" sz="1400" dirty="0">
+                <a:solidFill>
+                  <a:srgbClr val="4A5A61"/>
+                </a:solidFill>
+                <a:latin typeface="IBM Plex Sans" pitchFamily="34" charset="0"/>
+                <a:ea typeface="IBM Plex Sans" pitchFamily="34" charset="-122"/>
+                <a:cs typeface="IBM Plex Sans" pitchFamily="34" charset="-120"/>
+              </a:rPr>
+              <a:t> </a:t>
+            </a:r>
+          </a:p>
+          <a:p>
+            <a:pPr marL="0" indent="0" algn="l">
+              <a:lnSpc>
+                <a:spcPts val="1960"/>
+              </a:lnSpc>
+              <a:buNone/>
+            </a:pPr>
+            <a:r>
+              <a:rPr lang="en-US" sz="1400" dirty="0">
+                <a:solidFill>
+                  <a:srgbClr val="4A5A61"/>
+                </a:solidFill>
+                <a:latin typeface="IBM Plex Sans" pitchFamily="34" charset="0"/>
+                <a:ea typeface="IBM Plex Sans" pitchFamily="34" charset="-122"/>
+                <a:cs typeface="IBM Plex Sans" pitchFamily="34" charset="-120"/>
+              </a:rPr>
+              <a:t>43 % des achats (27,2 M€), tous du segment « Gros volumes ».</a:t>
             </a:r>
             <a:endParaRPr lang="en-US" sz="1400" dirty="0"/>
           </a:p>
@@ -3692,12 +3645,6 @@
           </a:bodyPr>
           <a:lstStyle/>
           <a:p>
-            <a:pPr marL="0" indent="0" algn="l">
-              <a:lnSpc>
-                <a:spcPts val="1960"/>
-              </a:lnSpc>
-              <a:buNone/>
-            </a:pPr>
             <a:r>
               <a:rPr lang="en-US" sz="1400" dirty="0">
                 <a:solidFill>
@@ -3707,9 +3654,48 @@
                 <a:ea typeface="IBM Plex Sans" pitchFamily="34" charset="-122"/>
                 <a:cs typeface="IBM Plex Sans" pitchFamily="34" charset="-120"/>
               </a:rPr>
-              <a:t>9 jours pour presque tous, 25 jours pour les vêtements. Retards quasi inexistants.</a:t>
-            </a:r>
-            <a:endParaRPr lang="en-US" sz="1400" dirty="0"/>
+              <a:t>9 jours pour presque tous, 25 jours pour les vêtements. Retards quasi </a:t>
+            </a:r>
+            <a:r>
+              <a:rPr lang="en-US" sz="1400" dirty="0" err="1">
+                <a:solidFill>
+                  <a:srgbClr val="4A5A61"/>
+                </a:solidFill>
+                <a:latin typeface="IBM Plex Sans" pitchFamily="34" charset="0"/>
+                <a:ea typeface="IBM Plex Sans" pitchFamily="34" charset="-122"/>
+                <a:cs typeface="IBM Plex Sans" pitchFamily="34" charset="-120"/>
+              </a:rPr>
+              <a:t>inexistants</a:t>
+            </a:r>
+            <a:r>
+              <a:rPr lang="en-US" sz="1400" dirty="0">
+                <a:solidFill>
+                  <a:srgbClr val="4A5A61"/>
+                </a:solidFill>
+                <a:latin typeface="IBM Plex Sans" pitchFamily="34" charset="0"/>
+                <a:ea typeface="IBM Plex Sans" pitchFamily="34" charset="-122"/>
+                <a:cs typeface="IBM Plex Sans" pitchFamily="34" charset="-120"/>
+              </a:rPr>
+              <a:t>, </a:t>
+            </a:r>
+            <a:r>
+              <a:rPr lang="fr-FR" sz="1400" dirty="0">
+                <a:solidFill>
+                  <a:srgbClr val="4A5A61"/>
+                </a:solidFill>
+                <a:latin typeface="IBM Plex Sans" pitchFamily="34" charset="0"/>
+              </a:rPr>
+              <a:t>délais très réguliers.</a:t>
+            </a:r>
+            <a:r>
+              <a:rPr lang="en-US" sz="1400" dirty="0">
+                <a:solidFill>
+                  <a:srgbClr val="4A5A61"/>
+                </a:solidFill>
+                <a:latin typeface="IBM Plex Sans" pitchFamily="34" charset="0"/>
+              </a:rPr>
+              <a:t>.</a:t>
+            </a:r>
           </a:p>
         </p:txBody>
       </p:sp>
@@ -6579,7 +6565,7 @@
           <p:nvPr>
             <p:extLst>
               <p:ext uri="{D42A27DB-BD31-4B8C-83A1-F6EECF244321}">
-                <p14:modId xmlns:p14="http://schemas.microsoft.com/office/powerpoint/2010/main" val="1579011935"/>
+                <p14:modId xmlns:p14="http://schemas.microsoft.com/office/powerpoint/2010/main" val="3618539487"/>
               </p:ext>
             </p:extLst>
           </p:nvPr>
@@ -7138,7 +7124,7 @@
                           <a:ea typeface="IBM Plex Sans" pitchFamily="34" charset="-122"/>
                           <a:cs typeface="IBM Plex Sans" pitchFamily="34" charset="-120"/>
                         </a:rPr>
-                        <a:t>+255 %</a:t>
+                        <a:t>+31 %</a:t>
                       </a:r>
                       <a:endParaRPr lang="en-US" sz="1400" dirty="0">
                         <a:latin typeface="IBM Plex Sans" charset="0"/>
@@ -8069,24 +8055,19 @@
           </a:bodyPr>
           <a:lstStyle/>
           <a:p>
-            <a:pPr marL="0" indent="0" algn="l">
-              <a:lnSpc>
-                <a:spcPts val="1680"/>
-              </a:lnSpc>
-              <a:buNone/>
-            </a:pPr>
-            <a:r>
-              <a:rPr lang="en-US" sz="1200" dirty="0">
-                <a:solidFill>
-                  <a:srgbClr val="BFD8D5"/>
-                </a:solidFill>
-                <a:latin typeface="IBM Plex Sans" pitchFamily="34" charset="0"/>
-                <a:ea typeface="IBM Plex Sans" pitchFamily="34" charset="-122"/>
-                <a:cs typeface="IBM Plex Sans" pitchFamily="34" charset="-120"/>
-              </a:rPr>
-              <a:t>76 produits achetés puis revendus. Écart des accessoires porté par les pneus et chambres à air.</a:t>
-            </a:r>
-            <a:endParaRPr lang="en-US" sz="1200" dirty="0"/>
+            <a:r>
+              <a:rPr lang="fr-FR" sz="1200" dirty="0">
+                <a:solidFill>
+                  <a:schemeClr val="bg1"/>
+                </a:solidFill>
+              </a:rPr>
+              <a:t>76 produits achetés puis revendus. Écart calculé sur les ventes.</a:t>
+            </a:r>
+            <a:endParaRPr lang="en-US" sz="1200" dirty="0">
+              <a:solidFill>
+                <a:schemeClr val="bg1"/>
+              </a:solidFill>
+            </a:endParaRPr>
           </a:p>
         </p:txBody>
       </p:sp>
@@ -8128,7 +8109,18 @@
                 <a:ea typeface="Rubik" pitchFamily="34" charset="-122"/>
                 <a:cs typeface="Rubik" pitchFamily="34" charset="-120"/>
               </a:rPr>
-              <a:t>−9,4</a:t>
+              <a:t>−9,4 </a:t>
+            </a:r>
+            <a:r>
+              <a:rPr lang="fr-FR" sz="8000" b="1" dirty="0">
+                <a:solidFill>
+                  <a:srgbClr val="7DBE9A"/>
+                </a:solidFill>
+                <a:latin typeface="Rubik" pitchFamily="34" charset="0"/>
+                <a:ea typeface="Rubik" pitchFamily="34" charset="-122"/>
+                <a:cs typeface="Rubik" pitchFamily="34" charset="-120"/>
+              </a:rPr>
+              <a:t>pts</a:t>
             </a:r>
             <a:endParaRPr lang="en-US" sz="8000" dirty="0"/>
           </a:p>
@@ -8678,12 +8670,6 @@
           </a:bodyPr>
           <a:lstStyle/>
           <a:p>
-            <a:pPr marL="0" indent="0" algn="l">
-              <a:lnSpc>
-                <a:spcPts val="1960"/>
-              </a:lnSpc>
-              <a:buNone/>
-            </a:pPr>
             <a:r>
               <a:rPr lang="en-US" sz="1400" dirty="0">
                 <a:solidFill>
@@ -8693,7 +8679,76 @@
                 <a:ea typeface="IBM Plex Sans" pitchFamily="34" charset="-122"/>
                 <a:cs typeface="IBM Plex Sans" pitchFamily="34" charset="-120"/>
               </a:rPr>
-              <a:t>20,1 M€ en stock, 225 jours de couverture. Les composants cumulent la rotation la plus lente (436 j) et la marge la plus faible (4,2 %).</a:t>
+              <a:t>20,1 M€ en stock, 225 jours de couverture. Les </a:t>
+            </a:r>
+            <a:r>
+              <a:rPr lang="en-US" sz="1400" dirty="0" err="1">
+                <a:solidFill>
+                  <a:srgbClr val="4A5A61"/>
+                </a:solidFill>
+                <a:latin typeface="IBM Plex Sans" pitchFamily="34" charset="0"/>
+                <a:ea typeface="IBM Plex Sans" pitchFamily="34" charset="-122"/>
+                <a:cs typeface="IBM Plex Sans" pitchFamily="34" charset="-120"/>
+              </a:rPr>
+              <a:t>composants</a:t>
+            </a:r>
+            <a:r>
+              <a:rPr lang="en-US" sz="1400" dirty="0">
+                <a:solidFill>
+                  <a:srgbClr val="4A5A61"/>
+                </a:solidFill>
+                <a:latin typeface="IBM Plex Sans" pitchFamily="34" charset="0"/>
+                <a:ea typeface="IBM Plex Sans" pitchFamily="34" charset="-122"/>
+                <a:cs typeface="IBM Plex Sans" pitchFamily="34" charset="-120"/>
+              </a:rPr>
+              <a:t> </a:t>
+            </a:r>
+            <a:r>
+              <a:rPr lang="en-US" sz="1400" dirty="0" err="1">
+                <a:solidFill>
+                  <a:srgbClr val="4A5A61"/>
+                </a:solidFill>
+                <a:latin typeface="IBM Plex Sans" pitchFamily="34" charset="0"/>
+              </a:rPr>
+              <a:t>cumulent</a:t>
+            </a:r>
+            <a:r>
+              <a:rPr lang="en-US" sz="1400" dirty="0">
+                <a:solidFill>
+                  <a:srgbClr val="4A5A61"/>
+                </a:solidFill>
+                <a:latin typeface="IBM Plex Sans" pitchFamily="34" charset="0"/>
+              </a:rPr>
+              <a:t> </a:t>
+            </a:r>
+            <a:r>
+              <a:rPr lang="fr-FR" sz="1400" dirty="0">
+                <a:solidFill>
+                  <a:srgbClr val="4A5A61"/>
+                </a:solidFill>
+                <a:latin typeface="IBM Plex Sans" pitchFamily="34" charset="0"/>
+              </a:rPr>
+              <a:t>la couverture la plus longue (436 j)</a:t>
+            </a:r>
+            <a:r>
+              <a:rPr lang="en-US" sz="1400" dirty="0">
+                <a:solidFill>
+                  <a:srgbClr val="4A5A61"/>
+                </a:solidFill>
+                <a:latin typeface="IBM Plex Sans" pitchFamily="34" charset="0"/>
+              </a:rPr>
+              <a:t>et </a:t>
+            </a:r>
+            <a:r>
+              <a:rPr lang="en-US" sz="1400" dirty="0">
+                <a:solidFill>
+                  <a:srgbClr val="4A5A61"/>
+                </a:solidFill>
+                <a:latin typeface="IBM Plex Sans" pitchFamily="34" charset="0"/>
+                <a:ea typeface="IBM Plex Sans" pitchFamily="34" charset="-122"/>
+                <a:cs typeface="IBM Plex Sans" pitchFamily="34" charset="-120"/>
+              </a:rPr>
+              <a:t>la marge la plus faible (4,2 %).</a:t>
             </a:r>
             <a:endParaRPr lang="en-US" sz="1400" dirty="0"/>
           </a:p>
@@ -9210,7 +9265,7 @@
           <p:nvPr>
             <p:extLst>
               <p:ext uri="{D42A27DB-BD31-4B8C-83A1-F6EECF244321}">
-                <p14:modId xmlns:p14="http://schemas.microsoft.com/office/powerpoint/2010/main" val="1343099383"/>
+                <p14:modId xmlns:p14="http://schemas.microsoft.com/office/powerpoint/2010/main" val="1484922384"/>
               </p:ext>
             </p:extLst>
           </p:nvPr>
@@ -9512,20 +9567,13 @@
                     <a:p>
                       <a:pPr marL="0" indent="0">
                         <a:lnSpc>
-                          <a:spcPts val="1960"/>
+                          <a:spcPct val="100000"/>
                         </a:lnSpc>
                         <a:buNone/>
                       </a:pPr>
                       <a:r>
-                        <a:rPr lang="en-US" sz="1400" dirty="0">
-                          <a:solidFill>
-                            <a:srgbClr val="1F2A2E"/>
-                          </a:solidFill>
-                          <a:latin typeface="IBM Plex Sans" pitchFamily="34" charset="0"/>
-                          <a:ea typeface="IBM Plex Sans" pitchFamily="34" charset="-122"/>
-                          <a:cs typeface="IBM Plex Sans" pitchFamily="34" charset="-120"/>
-                        </a:rPr>
-                        <a:t>Composants, pneus et chambres à air</a:t>
+                        <a:rPr lang="fr-FR" sz="1400" dirty="0"/>
+                        <a:t>Composants (+75 % vs coût standard)</a:t>
                       </a:r>
                       <a:endParaRPr lang="en-US" sz="1400" dirty="0">
                         <a:latin typeface="IBM Plex Sans" charset="0"/>
@@ -9585,6 +9633,17 @@
                         <a:buNone/>
                       </a:pPr>
                       <a:r>
+                        <a:rPr lang="en-US" sz="1400" dirty="0" err="1">
+                          <a:solidFill>
+                            <a:srgbClr val="1F2A2E"/>
+                          </a:solidFill>
+                          <a:latin typeface="IBM Plex Sans" pitchFamily="34" charset="0"/>
+                          <a:ea typeface="IBM Plex Sans" pitchFamily="34" charset="-122"/>
+                          <a:cs typeface="IBM Plex Sans" pitchFamily="34" charset="-120"/>
+                        </a:rPr>
+                        <a:t>Récupérer</a:t>
+                      </a:r>
+                      <a:r>
                         <a:rPr lang="en-US" sz="1400" dirty="0">
                           <a:solidFill>
                             <a:srgbClr val="1F2A2E"/>
@@ -9593,7 +9652,51 @@
                           <a:ea typeface="IBM Plex Sans" pitchFamily="34" charset="-122"/>
                           <a:cs typeface="IBM Plex Sans" pitchFamily="34" charset="-120"/>
                         </a:rPr>
-                        <a:t>Récupérer une partie des 9,4 points de marge</a:t>
+                        <a:t> </a:t>
+                      </a:r>
+                      <a:r>
+                        <a:rPr lang="en-US" sz="1400" dirty="0" err="1">
+                          <a:solidFill>
+                            <a:srgbClr val="1F2A2E"/>
+                          </a:solidFill>
+                          <a:latin typeface="IBM Plex Sans" pitchFamily="34" charset="0"/>
+                          <a:ea typeface="IBM Plex Sans" pitchFamily="34" charset="-122"/>
+                          <a:cs typeface="IBM Plex Sans" pitchFamily="34" charset="-120"/>
+                        </a:rPr>
+                        <a:t>une</a:t>
+                      </a:r>
+                      <a:r>
+                        <a:rPr lang="en-US" sz="1400" dirty="0">
+                          <a:solidFill>
+                            <a:srgbClr val="1F2A2E"/>
+                          </a:solidFill>
+                          <a:latin typeface="IBM Plex Sans" pitchFamily="34" charset="0"/>
+                          <a:ea typeface="IBM Plex Sans" pitchFamily="34" charset="-122"/>
+                          <a:cs typeface="IBM Plex Sans" pitchFamily="34" charset="-120"/>
+                        </a:rPr>
+                        <a:t> </a:t>
+                      </a:r>
+                      <a:r>
+                        <a:rPr lang="en-US" sz="1400" dirty="0" err="1">
+                          <a:solidFill>
+                            <a:srgbClr val="1F2A2E"/>
+                          </a:solidFill>
+                          <a:latin typeface="IBM Plex Sans" pitchFamily="34" charset="0"/>
+                          <a:ea typeface="IBM Plex Sans" pitchFamily="34" charset="-122"/>
+                          <a:cs typeface="IBM Plex Sans" pitchFamily="34" charset="-120"/>
+                        </a:rPr>
+                        <a:t>partie</a:t>
+                      </a:r>
+                      <a:r>
+                        <a:rPr lang="en-US" sz="1400" dirty="0">
+                          <a:solidFill>
+                            <a:srgbClr val="1F2A2E"/>
+                          </a:solidFill>
+                          <a:latin typeface="IBM Plex Sans" pitchFamily="34" charset="0"/>
+                          <a:ea typeface="IBM Plex Sans" pitchFamily="34" charset="-122"/>
+                          <a:cs typeface="IBM Plex Sans" pitchFamily="34" charset="-120"/>
+                        </a:rPr>
+                        <a:t> des 9,4 points de marge</a:t>
                       </a:r>
                       <a:endParaRPr lang="en-US" sz="1400" dirty="0">
                         <a:latin typeface="IBM Plex Sans" charset="0"/>
@@ -9922,20 +10025,13 @@
                     <a:p>
                       <a:pPr marL="0" indent="0">
                         <a:lnSpc>
-                          <a:spcPts val="1960"/>
+                          <a:spcPct val="100000"/>
                         </a:lnSpc>
                         <a:buNone/>
                       </a:pPr>
                       <a:r>
-                        <a:rPr lang="en-US" sz="1400" dirty="0">
-                          <a:solidFill>
-                            <a:srgbClr val="1F2A2E"/>
-                          </a:solidFill>
-                          <a:latin typeface="IBM Plex Sans" pitchFamily="34" charset="0"/>
-                          <a:ea typeface="IBM Plex Sans" pitchFamily="34" charset="-122"/>
-                          <a:cs typeface="IBM Plex Sans" pitchFamily="34" charset="-120"/>
-                        </a:rPr>
-                        <a:t>Composants (436 jours) et 5 produits achetés sous le seuil</a:t>
+                        <a:rPr lang="fr-FR" sz="1400" dirty="0"/>
+                        <a:t>Composants (436 j) ; 19 produits à risque liés à 5 fournisseurs « Peu d’historique »</a:t>
                       </a:r>
                       <a:endParaRPr lang="en-US" sz="1400" dirty="0">
                         <a:latin typeface="IBM Plex Sans" charset="0"/>
@@ -9990,19 +10086,12 @@
                     <a:p>
                       <a:pPr marL="0" indent="0">
                         <a:lnSpc>
-                          <a:spcPts val="1960"/>
+                          <a:spcPct val="100000"/>
                         </a:lnSpc>
                         <a:buNone/>
                       </a:pPr>
                       <a:r>
-                        <a:rPr lang="en-US" sz="1400" dirty="0">
-                          <a:solidFill>
-                            <a:srgbClr val="1F2A2E"/>
-                          </a:solidFill>
-                          <a:latin typeface="IBM Plex Sans" pitchFamily="34" charset="0"/>
-                          <a:ea typeface="IBM Plex Sans" pitchFamily="34" charset="-122"/>
-                          <a:cs typeface="IBM Plex Sans" pitchFamily="34" charset="-120"/>
-                        </a:rPr>
+                        <a:rPr lang="fr-FR" sz="1400" dirty="0"/>
                         <a:t>Libérer du stock, éviter les ruptures</a:t>
                       </a:r>
                       <a:endParaRPr lang="en-US" sz="1400" dirty="0">
@@ -10195,7 +10284,7 @@
                     <a:p>
                       <a:pPr marL="0" indent="0">
                         <a:lnSpc>
-                          <a:spcPts val="1960"/>
+                          <a:spcPct val="100000"/>
                         </a:lnSpc>
                         <a:buNone/>
                       </a:pPr>
@@ -10208,7 +10297,33 @@
                           <a:ea typeface="IBM Plex Sans" pitchFamily="34" charset="-122"/>
                           <a:cs typeface="IBM Plex Sans" pitchFamily="34" charset="-120"/>
                         </a:rPr>
-                        <a:t>Supprimer les ventes à perte</a:t>
+                        <a:t>Supprimer les ventes à </a:t>
+                      </a:r>
+                      <a:r>
+                        <a:rPr lang="en-US" sz="1400" dirty="0" err="1">
+                          <a:solidFill>
+                            <a:srgbClr val="1F2A2E"/>
+                          </a:solidFill>
+                          <a:latin typeface="IBM Plex Sans" pitchFamily="34" charset="0"/>
+                          <a:ea typeface="IBM Plex Sans" pitchFamily="34" charset="-122"/>
+                          <a:cs typeface="IBM Plex Sans" pitchFamily="34" charset="-120"/>
+                        </a:rPr>
+                        <a:t>perte</a:t>
+                      </a:r>
+                      <a:r>
+                        <a:rPr lang="fr-FR" sz="1400" dirty="0">
+                          <a:solidFill>
+                            <a:srgbClr val="1F2A2E"/>
+                          </a:solidFill>
+                          <a:latin typeface="IBM Plex Sans" pitchFamily="34" charset="0"/>
+                          <a:ea typeface="IBM Plex Sans" pitchFamily="34" charset="-122"/>
+                          <a:cs typeface="IBM Plex Sans" pitchFamily="34" charset="-120"/>
+                        </a:rPr>
+                        <a:t>, </a:t>
+                      </a:r>
+                      <a:r>
+                        <a:rPr lang="fr-FR" sz="1400" dirty="0"/>
+                        <a:t>réduire le stock dormant,</a:t>
                       </a:r>
                       <a:endParaRPr lang="en-US" sz="1400" dirty="0">
                         <a:latin typeface="IBM Plex Sans" charset="0"/>
@@ -10635,17 +10750,6 @@
               </a:lnSpc>
               <a:buNone/>
             </a:pPr>
-            <a:r>
-              <a:rPr lang="en-US" sz="1200" dirty="0">
-                <a:solidFill>
-                  <a:srgbClr val="4A5A61"/>
-                </a:solidFill>
-                <a:latin typeface="IBM Plex Sans" pitchFamily="34" charset="0"/>
-                <a:ea typeface="IBM Plex Sans" pitchFamily="34" charset="-122"/>
-                <a:cs typeface="IBM Plex Sans" pitchFamily="34" charset="-120"/>
-              </a:rPr>
-              <a:t>Rejet 0,9 % · 19 produits · 45 unités par ligne</a:t>
-            </a:r>
             <a:endParaRPr lang="en-US" sz="1200" dirty="0"/>
           </a:p>
         </p:txBody>
@@ -10801,17 +10905,6 @@
               </a:lnSpc>
               <a:buNone/>
             </a:pPr>
-            <a:r>
-              <a:rPr lang="en-US" sz="1200" dirty="0">
-                <a:solidFill>
-                  <a:srgbClr val="4A5A61"/>
-                </a:solidFill>
-                <a:latin typeface="IBM Plex Sans" pitchFamily="34" charset="0"/>
-                <a:ea typeface="IBM Plex Sans" pitchFamily="34" charset="-122"/>
-                <a:cs typeface="IBM Plex Sans" pitchFamily="34" charset="-120"/>
-              </a:rPr>
-              <a:t>Rejet 3,4 %, le plus élevé · 2 produits · 510 unités par ligne</a:t>
-            </a:r>
             <a:endParaRPr lang="en-US" sz="1200" dirty="0"/>
           </a:p>
         </p:txBody>
@@ -10967,17 +11060,6 @@
               </a:lnSpc>
               <a:buNone/>
             </a:pPr>
-            <a:r>
-              <a:rPr lang="en-US" sz="1200" dirty="0">
-                <a:solidFill>
-                  <a:srgbClr val="4A5A61"/>
-                </a:solidFill>
-                <a:latin typeface="IBM Plex Sans" pitchFamily="34" charset="0"/>
-                <a:ea typeface="IBM Plex Sans" pitchFamily="34" charset="-122"/>
-                <a:cs typeface="IBM Plex Sans" pitchFamily="34" charset="-120"/>
-              </a:rPr>
-              <a:t>Rejet 1,9 % · 3 produits · 18 unités par ligne</a:t>
-            </a:r>
             <a:endParaRPr lang="en-US" sz="1200" dirty="0"/>
           </a:p>
         </p:txBody>
@@ -11420,1704 +11502,6 @@
 </file>
 
 <file path=ppt/slides/slide17.xml><?xml version="1.0" encoding="utf-8"?>
-<p:sld xmlns:a="http://schemas.openxmlformats.org/drawingml/2006/main" xmlns:r="http://schemas.openxmlformats.org/officeDocument/2006/relationships" xmlns:p="http://schemas.openxmlformats.org/presentationml/2006/main">
-  <p:cSld name="Slide 17">
-    <p:bg>
-      <p:bgPr>
-        <a:solidFill>
-          <a:srgbClr val="F4F6F5"/>
-        </a:solidFill>
-        <a:effectLst/>
-      </p:bgPr>
-    </p:bg>
-    <p:spTree>
-      <p:nvGrpSpPr>
-        <p:cNvPr id="1" name=""/>
-        <p:cNvGrpSpPr/>
-        <p:nvPr/>
-      </p:nvGrpSpPr>
-      <p:grpSpPr>
-        <a:xfrm>
-          <a:off x="0" y="0"/>
-          <a:ext cx="0" cy="0"/>
-          <a:chOff x="0" y="0"/>
-          <a:chExt cx="0" cy="0"/>
-        </a:xfrm>
-      </p:grpSpPr>
-      <p:sp>
-        <p:nvSpPr>
-          <p:cNvPr id="2" name="Text 0"/>
-          <p:cNvSpPr/>
-          <p:nvPr/>
-        </p:nvSpPr>
-        <p:spPr>
-          <a:xfrm>
-            <a:off x="812800" y="812800"/>
-            <a:ext cx="10883392" cy="238720"/>
-          </a:xfrm>
-          <a:prstGeom prst="rect">
-            <a:avLst/>
-          </a:prstGeom>
-          <a:noFill/>
-          <a:ln/>
-        </p:spPr>
-        <p:txBody>
-          <a:bodyPr wrap="square" lIns="0" tIns="0" rIns="0" bIns="0" rtlCol="0" anchor="t">
-            <a:normAutofit/>
-          </a:bodyPr>
-          <a:lstStyle/>
-          <a:p>
-            <a:pPr marL="0" indent="0" algn="l">
-              <a:lnSpc>
-                <a:spcPts val="1680"/>
-              </a:lnSpc>
-              <a:buNone/>
-            </a:pPr>
-            <a:r>
-              <a:rPr lang="en-US" sz="1200" b="1" kern="0" spc="100" dirty="0">
-                <a:solidFill>
-                  <a:srgbClr val="2F5D6E"/>
-                </a:solidFill>
-                <a:latin typeface="IBM Plex Sans" pitchFamily="34" charset="0"/>
-                <a:ea typeface="IBM Plex Sans" pitchFamily="34" charset="-122"/>
-                <a:cs typeface="IBM Plex Sans" pitchFamily="34" charset="-120"/>
-              </a:rPr>
-              <a:t>MACHINE LEARNING · CLASSIFICATION</a:t>
-            </a:r>
-            <a:endParaRPr lang="en-US" sz="1200" dirty="0"/>
-          </a:p>
-        </p:txBody>
-      </p:sp>
-      <p:sp>
-        <p:nvSpPr>
-          <p:cNvPr id="3" name="Text 1"/>
-          <p:cNvSpPr>
-            <a:spLocks noGrp="1"/>
-          </p:cNvSpPr>
-          <p:nvPr>
-            <p:ph type="title"/>
-          </p:nvPr>
-        </p:nvSpPr>
-        <p:spPr>
-          <a:xfrm>
-            <a:off x="812800" y="1127720"/>
-            <a:ext cx="10883392" cy="492720"/>
-          </a:xfrm>
-          <a:prstGeom prst="rect">
-            <a:avLst/>
-          </a:prstGeom>
-          <a:noFill/>
-          <a:ln/>
-        </p:spPr>
-        <p:txBody>
-          <a:bodyPr wrap="square" lIns="0" tIns="0" rIns="0" bIns="0" rtlCol="0" anchor="t">
-            <a:normAutofit/>
-          </a:bodyPr>
-          <a:lstStyle/>
-          <a:p>
-            <a:pPr marL="0" indent="0" algn="l">
-              <a:lnSpc>
-                <a:spcPts val="3680"/>
-              </a:lnSpc>
-              <a:buNone/>
-            </a:pPr>
-            <a:r>
-              <a:rPr lang="en-US" sz="3200" b="1" i="0" dirty="0">
-                <a:solidFill>
-                  <a:srgbClr val="1F2A2E"/>
-                </a:solidFill>
-                <a:latin typeface="Rubik" pitchFamily="34" charset="0"/>
-                <a:ea typeface="Rubik" pitchFamily="34" charset="-122"/>
-                <a:cs typeface="Rubik" pitchFamily="34" charset="-120"/>
-              </a:rPr>
-              <a:t>Détecter les produits à risque de rupture</a:t>
-            </a:r>
-            <a:endParaRPr lang="en-US" sz="3200" dirty="0"/>
-          </a:p>
-        </p:txBody>
-      </p:sp>
-      <p:sp>
-        <p:nvSpPr>
-          <p:cNvPr id="4" name="Shape 2"/>
-          <p:cNvSpPr/>
-          <p:nvPr/>
-        </p:nvSpPr>
-        <p:spPr>
-          <a:xfrm>
-            <a:off x="815975" y="1877616"/>
-            <a:ext cx="4400550" cy="2449761"/>
-          </a:xfrm>
-          <a:prstGeom prst="roundRect">
-            <a:avLst>
-              <a:gd name="adj" fmla="val 4018"/>
-            </a:avLst>
-          </a:prstGeom>
-          <a:solidFill>
-            <a:srgbClr val="FBFCFB"/>
-          </a:solidFill>
-          <a:ln w="6350">
-            <a:solidFill>
-              <a:srgbClr val="DCE3E0"/>
-            </a:solidFill>
-            <a:prstDash val="solid"/>
-          </a:ln>
-        </p:spPr>
-        <p:txBody>
-          <a:bodyPr/>
-          <a:lstStyle/>
-          <a:p>
-            <a:endParaRPr lang="fr-FR"/>
-          </a:p>
-        </p:txBody>
-      </p:sp>
-      <p:sp>
-        <p:nvSpPr>
-          <p:cNvPr id="5" name="Text 3"/>
-          <p:cNvSpPr/>
-          <p:nvPr/>
-        </p:nvSpPr>
-        <p:spPr>
-          <a:xfrm>
-            <a:off x="1047750" y="2109391"/>
-            <a:ext cx="4055110" cy="269230"/>
-          </a:xfrm>
-          <a:prstGeom prst="rect">
-            <a:avLst/>
-          </a:prstGeom>
-          <a:noFill/>
-          <a:ln/>
-        </p:spPr>
-        <p:txBody>
-          <a:bodyPr wrap="square" lIns="0" tIns="0" rIns="0" bIns="0" rtlCol="0" anchor="t">
-            <a:normAutofit/>
-          </a:bodyPr>
-          <a:lstStyle/>
-          <a:p>
-            <a:pPr marL="0" indent="0" algn="l">
-              <a:lnSpc>
-                <a:spcPts val="1920"/>
-              </a:lnSpc>
-              <a:buNone/>
-            </a:pPr>
-            <a:r>
-              <a:rPr lang="en-US" sz="1600" b="1" dirty="0">
-                <a:solidFill>
-                  <a:srgbClr val="1F2A2E"/>
-                </a:solidFill>
-                <a:latin typeface="Rubik" pitchFamily="34" charset="0"/>
-                <a:ea typeface="Rubik" pitchFamily="34" charset="-122"/>
-                <a:cs typeface="Rubik" pitchFamily="34" charset="-120"/>
-              </a:rPr>
-              <a:t>Jeu de données</a:t>
-            </a:r>
-            <a:endParaRPr lang="en-US" sz="1600" dirty="0"/>
-          </a:p>
-        </p:txBody>
-      </p:sp>
-      <p:sp>
-        <p:nvSpPr>
-          <p:cNvPr id="6" name="Text 4"/>
-          <p:cNvSpPr/>
-          <p:nvPr/>
-        </p:nvSpPr>
-        <p:spPr>
-          <a:xfrm>
-            <a:off x="1047750" y="2442121"/>
-            <a:ext cx="4055110" cy="487660"/>
-          </a:xfrm>
-          <a:prstGeom prst="rect">
-            <a:avLst/>
-          </a:prstGeom>
-          <a:noFill/>
-          <a:ln/>
-        </p:spPr>
-        <p:txBody>
-          <a:bodyPr wrap="square" lIns="0" tIns="0" rIns="0" bIns="0" rtlCol="0" anchor="t">
-            <a:normAutofit/>
-          </a:bodyPr>
-          <a:lstStyle/>
-          <a:p>
-            <a:pPr marL="0" indent="0" algn="l">
-              <a:lnSpc>
-                <a:spcPts val="1820"/>
-              </a:lnSpc>
-              <a:buNone/>
-            </a:pPr>
-            <a:r>
-              <a:rPr lang="en-US" sz="1300" dirty="0">
-                <a:solidFill>
-                  <a:srgbClr val="4A5A61"/>
-                </a:solidFill>
-                <a:latin typeface="IBM Plex Sans" pitchFamily="34" charset="0"/>
-                <a:ea typeface="IBM Plex Sans" pitchFamily="34" charset="-122"/>
-                <a:cs typeface="IBM Plex Sans" pitchFamily="34" charset="-120"/>
-              </a:rPr>
-              <a:t>151 produits finis au stock connu, dont 30,5 % sous le seuil</a:t>
-            </a:r>
-            <a:endParaRPr lang="en-US" sz="1300" dirty="0"/>
-          </a:p>
-        </p:txBody>
-      </p:sp>
-      <p:sp>
-        <p:nvSpPr>
-          <p:cNvPr id="7" name="Text 5"/>
-          <p:cNvSpPr/>
-          <p:nvPr/>
-        </p:nvSpPr>
-        <p:spPr>
-          <a:xfrm>
-            <a:off x="1047750" y="2993281"/>
-            <a:ext cx="4055110" cy="256530"/>
-          </a:xfrm>
-          <a:prstGeom prst="rect">
-            <a:avLst/>
-          </a:prstGeom>
-          <a:noFill/>
-          <a:ln/>
-        </p:spPr>
-        <p:txBody>
-          <a:bodyPr wrap="square" lIns="0" tIns="0" rIns="0" bIns="0" rtlCol="0" anchor="t">
-            <a:normAutofit/>
-          </a:bodyPr>
-          <a:lstStyle/>
-          <a:p>
-            <a:pPr marL="0" indent="0" algn="l">
-              <a:lnSpc>
-                <a:spcPts val="1820"/>
-              </a:lnSpc>
-              <a:buNone/>
-            </a:pPr>
-            <a:r>
-              <a:rPr lang="en-US" sz="1300" dirty="0">
-                <a:solidFill>
-                  <a:srgbClr val="4A5A61"/>
-                </a:solidFill>
-                <a:latin typeface="IBM Plex Sans" pitchFamily="34" charset="0"/>
-                <a:ea typeface="IBM Plex Sans" pitchFamily="34" charset="-122"/>
-                <a:cs typeface="IBM Plex Sans" pitchFamily="34" charset="-120"/>
-              </a:rPr>
-              <a:t>Cible : stock &lt; point de commande</a:t>
-            </a:r>
-            <a:endParaRPr lang="en-US" sz="1300" dirty="0"/>
-          </a:p>
-        </p:txBody>
-      </p:sp>
-      <p:sp>
-        <p:nvSpPr>
-          <p:cNvPr id="8" name="Text 6"/>
-          <p:cNvSpPr/>
-          <p:nvPr/>
-        </p:nvSpPr>
-        <p:spPr>
-          <a:xfrm>
-            <a:off x="1047750" y="3313311"/>
-            <a:ext cx="4055110" cy="487660"/>
-          </a:xfrm>
-          <a:prstGeom prst="rect">
-            <a:avLst/>
-          </a:prstGeom>
-          <a:noFill/>
-          <a:ln/>
-        </p:spPr>
-        <p:txBody>
-          <a:bodyPr wrap="square" lIns="0" tIns="0" rIns="0" bIns="0" rtlCol="0" anchor="t">
-            <a:normAutofit/>
-          </a:bodyPr>
-          <a:lstStyle/>
-          <a:p>
-            <a:pPr marL="0" indent="0" algn="l">
-              <a:lnSpc>
-                <a:spcPts val="1820"/>
-              </a:lnSpc>
-              <a:buNone/>
-            </a:pPr>
-            <a:r>
-              <a:rPr lang="en-US" sz="1300" dirty="0">
-                <a:solidFill>
-                  <a:srgbClr val="4A5A61"/>
-                </a:solidFill>
-                <a:latin typeface="IBM Plex Sans" pitchFamily="34" charset="0"/>
-                <a:ea typeface="IBM Plex Sans" pitchFamily="34" charset="-122"/>
-                <a:cs typeface="IBM Plex Sans" pitchFamily="34" charset="-120"/>
-              </a:rPr>
-              <a:t>4 variables : vitesse de vente, seuil, quantité en commande, délai</a:t>
-            </a:r>
-            <a:endParaRPr lang="en-US" sz="1300" dirty="0"/>
-          </a:p>
-        </p:txBody>
-      </p:sp>
-      <p:sp>
-        <p:nvSpPr>
-          <p:cNvPr id="9" name="Text 7"/>
-          <p:cNvSpPr/>
-          <p:nvPr/>
-        </p:nvSpPr>
-        <p:spPr>
-          <a:xfrm>
-            <a:off x="1047750" y="3864471"/>
-            <a:ext cx="4055110" cy="256530"/>
-          </a:xfrm>
-          <a:prstGeom prst="rect">
-            <a:avLst/>
-          </a:prstGeom>
-          <a:noFill/>
-          <a:ln/>
-        </p:spPr>
-        <p:txBody>
-          <a:bodyPr wrap="square" lIns="0" tIns="0" rIns="0" bIns="0" rtlCol="0" anchor="t">
-            <a:normAutofit/>
-          </a:bodyPr>
-          <a:lstStyle/>
-          <a:p>
-            <a:pPr marL="0" indent="0" algn="l">
-              <a:lnSpc>
-                <a:spcPts val="1820"/>
-              </a:lnSpc>
-              <a:buNone/>
-            </a:pPr>
-            <a:r>
-              <a:rPr lang="en-US" sz="1300" dirty="0">
-                <a:solidFill>
-                  <a:srgbClr val="4A5A61"/>
-                </a:solidFill>
-                <a:latin typeface="IBM Plex Sans" pitchFamily="34" charset="0"/>
-                <a:ea typeface="IBM Plex Sans" pitchFamily="34" charset="-122"/>
-                <a:cs typeface="IBM Plex Sans" pitchFamily="34" charset="-120"/>
-              </a:rPr>
-              <a:t>Split 75 / 25 stratifié, classes pondérées</a:t>
-            </a:r>
-            <a:endParaRPr lang="en-US" sz="1300" dirty="0"/>
-          </a:p>
-        </p:txBody>
-      </p:sp>
-      <p:sp>
-        <p:nvSpPr>
-          <p:cNvPr id="10" name="Shape 8"/>
-          <p:cNvSpPr/>
-          <p:nvPr/>
-        </p:nvSpPr>
-        <p:spPr>
-          <a:xfrm>
-            <a:off x="5473700" y="1874441"/>
-            <a:ext cx="6096000" cy="1811982"/>
-          </a:xfrm>
-          <a:prstGeom prst="roundRect">
-            <a:avLst>
-              <a:gd name="adj" fmla="val 4205"/>
-            </a:avLst>
-          </a:prstGeom>
-          <a:solidFill>
-            <a:srgbClr val="FBFCFB"/>
-          </a:solidFill>
-          <a:ln/>
-        </p:spPr>
-        <p:txBody>
-          <a:bodyPr/>
-          <a:lstStyle/>
-          <a:p>
-            <a:endParaRPr lang="fr-FR"/>
-          </a:p>
-        </p:txBody>
-      </p:sp>
-      <p:sp>
-        <p:nvSpPr>
-          <p:cNvPr id="11" name="Shape 9"/>
-          <p:cNvSpPr/>
-          <p:nvPr/>
-        </p:nvSpPr>
-        <p:spPr>
-          <a:xfrm>
-            <a:off x="5473700" y="1874441"/>
-            <a:ext cx="6096000" cy="1811982"/>
-          </a:xfrm>
-          <a:custGeom>
-            <a:avLst/>
-            <a:gdLst/>
-            <a:ahLst/>
-            <a:cxnLst/>
-            <a:rect l="l" t="t" r="r" b="b"/>
-            <a:pathLst>
-              <a:path w="6096000" h="1811982">
-                <a:moveTo>
-                  <a:pt x="6019800" y="0"/>
-                </a:moveTo>
-                <a:lnTo>
-                  <a:pt x="6019800" y="0"/>
-                </a:lnTo>
-                <a:arcTo wR="76200" hR="76200" stAng="16200000" swAng="5400000"/>
-                <a:lnTo>
-                  <a:pt x="6096000" y="1735782"/>
-                </a:lnTo>
-                <a:arcTo wR="76200" hR="76200" stAng="0" swAng="5400000"/>
-                <a:lnTo>
-                  <a:pt x="76200" y="1811982"/>
-                </a:lnTo>
-                <a:arcTo wR="76200" hR="76200" stAng="5400000" swAng="5400000"/>
-                <a:lnTo>
-                  <a:pt x="0" y="1735782"/>
-                </a:lnTo>
-                <a:arcTo wR="76200" hR="69850" stAng="10800000" swAng="-5400000"/>
-                <a:lnTo>
-                  <a:pt x="6019800" y="1805632"/>
-                </a:lnTo>
-                <a:arcTo wR="69850" hR="69850" stAng="5400000" swAng="-5400000"/>
-                <a:lnTo>
-                  <a:pt x="6089650" y="76200"/>
-                </a:lnTo>
-                <a:arcTo wR="69850" hR="76200" stAng="0" swAng="-5400000"/>
-                <a:close/>
-              </a:path>
-            </a:pathLst>
-          </a:custGeom>
-          <a:solidFill>
-            <a:srgbClr val="DCE3E0"/>
-          </a:solidFill>
-          <a:ln/>
-        </p:spPr>
-        <p:txBody>
-          <a:bodyPr/>
-          <a:lstStyle/>
-          <a:p>
-            <a:endParaRPr lang="fr-FR"/>
-          </a:p>
-        </p:txBody>
-      </p:sp>
-      <p:sp>
-        <p:nvSpPr>
-          <p:cNvPr id="12" name="Shape 10"/>
-          <p:cNvSpPr/>
-          <p:nvPr/>
-        </p:nvSpPr>
-        <p:spPr>
-          <a:xfrm>
-            <a:off x="5473700" y="1874441"/>
-            <a:ext cx="6096000" cy="1811982"/>
-          </a:xfrm>
-          <a:custGeom>
-            <a:avLst/>
-            <a:gdLst/>
-            <a:ahLst/>
-            <a:cxnLst/>
-            <a:rect l="l" t="t" r="r" b="b"/>
-            <a:pathLst>
-              <a:path w="6096000" h="1811982">
-                <a:moveTo>
-                  <a:pt x="76200" y="1811982"/>
-                </a:moveTo>
-                <a:lnTo>
-                  <a:pt x="76200" y="1811982"/>
-                </a:lnTo>
-                <a:arcTo wR="76200" hR="76200" stAng="5400000" swAng="5400000"/>
-                <a:lnTo>
-                  <a:pt x="0" y="76200"/>
-                </a:lnTo>
-                <a:arcTo wR="76200" hR="76200" stAng="10800000" swAng="5400000"/>
-                <a:lnTo>
-                  <a:pt x="6019800" y="0"/>
-                </a:lnTo>
-                <a:arcTo wR="76200" hR="76200" stAng="16200000" swAng="5400000"/>
-                <a:lnTo>
-                  <a:pt x="6096000" y="76200"/>
-                </a:lnTo>
-                <a:arcTo wR="76200" hR="63500" stAng="0" swAng="-5400000"/>
-                <a:lnTo>
-                  <a:pt x="76200" y="12700"/>
-                </a:lnTo>
-                <a:arcTo wR="63500" hR="63500" stAng="16200000" swAng="-5400000"/>
-                <a:lnTo>
-                  <a:pt x="12700" y="1735782"/>
-                </a:lnTo>
-                <a:arcTo wR="63500" hR="76200" stAng="10800000" swAng="-5400000"/>
-                <a:close/>
-              </a:path>
-            </a:pathLst>
-          </a:custGeom>
-          <a:solidFill>
-            <a:srgbClr val="141413">
-              <a:alpha val="22000"/>
-            </a:srgbClr>
-          </a:solidFill>
-          <a:ln/>
-        </p:spPr>
-        <p:txBody>
-          <a:bodyPr/>
-          <a:lstStyle/>
-          <a:p>
-            <a:endParaRPr lang="fr-FR"/>
-          </a:p>
-        </p:txBody>
-      </p:sp>
-      <p:graphicFrame>
-        <p:nvGraphicFramePr>
-          <p:cNvPr id="13" name="Table 0"/>
-          <p:cNvGraphicFramePr>
-            <a:graphicFrameLocks noGrp="1"/>
-          </p:cNvGraphicFramePr>
-          <p:nvPr>
-            <p:extLst>
-              <p:ext uri="{D42A27DB-BD31-4B8C-83A1-F6EECF244321}">
-                <p14:modId xmlns:p14="http://schemas.microsoft.com/office/powerpoint/2010/main" val="1579011935"/>
-              </p:ext>
-            </p:extLst>
-          </p:nvPr>
-        </p:nvGraphicFramePr>
-        <p:xfrm>
-          <a:off x="5486400" y="1887141"/>
-          <a:ext cx="6076950" cy="1792934"/>
-        </p:xfrm>
-        <a:graphic>
-          <a:graphicData uri="http://schemas.openxmlformats.org/drawingml/2006/table">
-            <a:tbl>
-              <a:tblPr/>
-              <a:tblGrid>
-                <a:gridCol w="2430780">
-                  <a:extLst>
-                    <a:ext uri="{9D8B030D-6E8A-4147-A177-3AD203B41FA5}">
-                      <a16:colId xmlns:a16="http://schemas.microsoft.com/office/drawing/2014/main" val="20000"/>
-                    </a:ext>
-                  </a:extLst>
-                </a:gridCol>
-                <a:gridCol w="1823085">
-                  <a:extLst>
-                    <a:ext uri="{9D8B030D-6E8A-4147-A177-3AD203B41FA5}">
-                      <a16:colId xmlns:a16="http://schemas.microsoft.com/office/drawing/2014/main" val="20001"/>
-                    </a:ext>
-                  </a:extLst>
-                </a:gridCol>
-                <a:gridCol w="1823085">
-                  <a:extLst>
-                    <a:ext uri="{9D8B030D-6E8A-4147-A177-3AD203B41FA5}">
-                      <a16:colId xmlns:a16="http://schemas.microsoft.com/office/drawing/2014/main" val="20002"/>
-                    </a:ext>
-                  </a:extLst>
-                </a:gridCol>
-              </a:tblGrid>
-              <a:tr h="634901">
-                <a:tc>
-                  <a:txBody>
-                    <a:bodyPr/>
-                    <a:lstStyle/>
-                    <a:p>
-                      <a:pPr marL="0" indent="0">
-                        <a:lnSpc>
-                          <a:spcPts val="1960"/>
-                        </a:lnSpc>
-                        <a:buNone/>
-                      </a:pPr>
-                      <a:r>
-                        <a:rPr lang="en-US" sz="1400" b="1" dirty="0">
-                          <a:solidFill>
-                            <a:srgbClr val="F4F6F5"/>
-                          </a:solidFill>
-                          <a:latin typeface="IBM Plex Sans" pitchFamily="34" charset="0"/>
-                          <a:ea typeface="IBM Plex Sans" pitchFamily="34" charset="-122"/>
-                          <a:cs typeface="IBM Plex Sans" pitchFamily="34" charset="-120"/>
-                        </a:rPr>
-                        <a:t>Classe « rupture »</a:t>
-                      </a:r>
-                      <a:endParaRPr lang="en-US" sz="1400" dirty="0">
-                        <a:latin typeface="IBM Plex Sans" charset="0"/>
-                        <a:ea typeface="IBM Plex Sans" charset="0"/>
-                        <a:cs typeface="IBM Plex Sans" charset="0"/>
-                      </a:endParaRPr>
-                    </a:p>
-                  </a:txBody>
-                  <a:tcPr marL="62230" marR="62230" marT="62230" marB="62230">
-                    <a:lnL w="0" cap="flat" cmpd="sng" algn="ctr">
-                      <a:noFill/>
-                    </a:lnL>
-                    <a:lnR w="12700" cap="flat" cmpd="sng" algn="ctr">
-                      <a:solidFill>
-                        <a:srgbClr val="1D323C"/>
-                      </a:solidFill>
-                      <a:prstDash val="solid"/>
-                      <a:round/>
-                      <a:headEnd type="none" w="med" len="med"/>
-                      <a:tailEnd type="none" w="med" len="med"/>
-                    </a:lnR>
-                    <a:lnT w="0" cap="flat" cmpd="sng" algn="ctr">
-                      <a:noFill/>
-                    </a:lnT>
-                    <a:lnB w="12700" cap="flat" cmpd="sng" algn="ctr">
-                      <a:solidFill>
-                        <a:srgbClr val="1D323C"/>
-                      </a:solidFill>
-                      <a:prstDash val="solid"/>
-                      <a:round/>
-                      <a:headEnd type="none" w="med" len="med"/>
-                      <a:tailEnd type="none" w="med" len="med"/>
-                    </a:lnB>
-                    <a:solidFill>
-                      <a:srgbClr val="1F3B47"/>
-                    </a:solidFill>
-                  </a:tcPr>
-                </a:tc>
-                <a:tc>
-                  <a:txBody>
-                    <a:bodyPr/>
-                    <a:lstStyle/>
-                    <a:p>
-                      <a:pPr marL="0" indent="0" algn="r">
-                        <a:lnSpc>
-                          <a:spcPts val="1960"/>
-                        </a:lnSpc>
-                        <a:buNone/>
-                      </a:pPr>
-                      <a:r>
-                        <a:rPr lang="en-US" sz="1400" b="1" dirty="0">
-                          <a:solidFill>
-                            <a:srgbClr val="F4F6F5"/>
-                          </a:solidFill>
-                          <a:latin typeface="IBM Plex Sans" pitchFamily="34" charset="0"/>
-                          <a:ea typeface="IBM Plex Sans" pitchFamily="34" charset="-122"/>
-                          <a:cs typeface="IBM Plex Sans" pitchFamily="34" charset="-120"/>
-                        </a:rPr>
-                        <a:t>Régression logistique</a:t>
-                      </a:r>
-                      <a:endParaRPr lang="en-US" sz="1400" dirty="0">
-                        <a:latin typeface="IBM Plex Sans" charset="0"/>
-                        <a:ea typeface="IBM Plex Sans" charset="0"/>
-                        <a:cs typeface="IBM Plex Sans" charset="0"/>
-                      </a:endParaRPr>
-                    </a:p>
-                  </a:txBody>
-                  <a:tcPr marL="62230" marR="62230" marT="62230" marB="62230">
-                    <a:lnL w="12700" cap="flat" cmpd="sng" algn="ctr">
-                      <a:solidFill>
-                        <a:srgbClr val="1D323C"/>
-                      </a:solidFill>
-                      <a:prstDash val="solid"/>
-                      <a:round/>
-                      <a:headEnd type="none" w="med" len="med"/>
-                      <a:tailEnd type="none" w="med" len="med"/>
-                    </a:lnL>
-                    <a:lnR w="12700" cap="flat" cmpd="sng" algn="ctr">
-                      <a:solidFill>
-                        <a:srgbClr val="1D323C"/>
-                      </a:solidFill>
-                      <a:prstDash val="solid"/>
-                      <a:round/>
-                      <a:headEnd type="none" w="med" len="med"/>
-                      <a:tailEnd type="none" w="med" len="med"/>
-                    </a:lnR>
-                    <a:lnT w="0" cap="flat" cmpd="sng" algn="ctr">
-                      <a:noFill/>
-                    </a:lnT>
-                    <a:lnB w="12700" cap="flat" cmpd="sng" algn="ctr">
-                      <a:solidFill>
-                        <a:srgbClr val="1D323C"/>
-                      </a:solidFill>
-                      <a:prstDash val="solid"/>
-                      <a:round/>
-                      <a:headEnd type="none" w="med" len="med"/>
-                      <a:tailEnd type="none" w="med" len="med"/>
-                    </a:lnB>
-                    <a:solidFill>
-                      <a:srgbClr val="1F3B47"/>
-                    </a:solidFill>
-                  </a:tcPr>
-                </a:tc>
-                <a:tc>
-                  <a:txBody>
-                    <a:bodyPr/>
-                    <a:lstStyle/>
-                    <a:p>
-                      <a:pPr marL="0" indent="0" algn="r">
-                        <a:lnSpc>
-                          <a:spcPts val="1960"/>
-                        </a:lnSpc>
-                        <a:buNone/>
-                      </a:pPr>
-                      <a:r>
-                        <a:rPr lang="en-US" sz="1400" b="1" dirty="0">
-                          <a:solidFill>
-                            <a:srgbClr val="F4F6F5"/>
-                          </a:solidFill>
-                          <a:latin typeface="IBM Plex Sans" pitchFamily="34" charset="0"/>
-                          <a:ea typeface="IBM Plex Sans" pitchFamily="34" charset="-122"/>
-                          <a:cs typeface="IBM Plex Sans" pitchFamily="34" charset="-120"/>
-                        </a:rPr>
-                        <a:t>Random Forest</a:t>
-                      </a:r>
-                      <a:endParaRPr lang="en-US" sz="1400" dirty="0">
-                        <a:latin typeface="IBM Plex Sans" charset="0"/>
-                        <a:ea typeface="IBM Plex Sans" charset="0"/>
-                        <a:cs typeface="IBM Plex Sans" charset="0"/>
-                      </a:endParaRPr>
-                    </a:p>
-                  </a:txBody>
-                  <a:tcPr marL="62230" marR="62230" marT="62230" marB="62230">
-                    <a:lnL w="12700" cap="flat" cmpd="sng" algn="ctr">
-                      <a:solidFill>
-                        <a:srgbClr val="1D323C"/>
-                      </a:solidFill>
-                      <a:prstDash val="solid"/>
-                      <a:round/>
-                      <a:headEnd type="none" w="med" len="med"/>
-                      <a:tailEnd type="none" w="med" len="med"/>
-                    </a:lnL>
-                    <a:lnR w="12700" cap="flat" cmpd="sng" algn="ctr">
-                      <a:solidFill>
-                        <a:srgbClr val="1D323C"/>
-                      </a:solidFill>
-                      <a:prstDash val="solid"/>
-                      <a:round/>
-                      <a:headEnd type="none" w="med" len="med"/>
-                      <a:tailEnd type="none" w="med" len="med"/>
-                    </a:lnR>
-                    <a:lnT w="0" cap="flat" cmpd="sng" algn="ctr">
-                      <a:noFill/>
-                    </a:lnT>
-                    <a:lnB w="12700" cap="flat" cmpd="sng" algn="ctr">
-                      <a:solidFill>
-                        <a:srgbClr val="1D323C"/>
-                      </a:solidFill>
-                      <a:prstDash val="solid"/>
-                      <a:round/>
-                      <a:headEnd type="none" w="med" len="med"/>
-                      <a:tailEnd type="none" w="med" len="med"/>
-                    </a:lnB>
-                    <a:solidFill>
-                      <a:srgbClr val="1F3B47"/>
-                    </a:solidFill>
-                  </a:tcPr>
-                </a:tc>
-                <a:extLst>
-                  <a:ext uri="{0D108BD9-81ED-4DB2-BD59-A6C34878D82A}">
-                    <a16:rowId xmlns:a16="http://schemas.microsoft.com/office/drawing/2014/main" val="10000"/>
-                  </a:ext>
-                </a:extLst>
-              </a:tr>
-              <a:tr h="386011">
-                <a:tc>
-                  <a:txBody>
-                    <a:bodyPr/>
-                    <a:lstStyle/>
-                    <a:p>
-                      <a:pPr marL="0" indent="0">
-                        <a:lnSpc>
-                          <a:spcPts val="1960"/>
-                        </a:lnSpc>
-                        <a:buNone/>
-                      </a:pPr>
-                      <a:r>
-                        <a:rPr lang="en-US" sz="1400" dirty="0">
-                          <a:solidFill>
-                            <a:srgbClr val="1F2A2E"/>
-                          </a:solidFill>
-                          <a:latin typeface="IBM Plex Sans" pitchFamily="34" charset="0"/>
-                          <a:ea typeface="IBM Plex Sans" pitchFamily="34" charset="-122"/>
-                          <a:cs typeface="IBM Plex Sans" pitchFamily="34" charset="-120"/>
-                        </a:rPr>
-                        <a:t>Rappel</a:t>
-                      </a:r>
-                      <a:endParaRPr lang="en-US" sz="1400" dirty="0">
-                        <a:latin typeface="IBM Plex Sans" charset="0"/>
-                        <a:ea typeface="IBM Plex Sans" charset="0"/>
-                        <a:cs typeface="IBM Plex Sans" charset="0"/>
-                      </a:endParaRPr>
-                    </a:p>
-                  </a:txBody>
-                  <a:tcPr marL="62230" marR="62230" marT="62230" marB="62230">
-                    <a:lnL w="0" cap="flat" cmpd="sng" algn="ctr">
-                      <a:noFill/>
-                    </a:lnL>
-                    <a:lnR w="12700" cap="flat" cmpd="sng" algn="ctr">
-                      <a:solidFill>
-                        <a:srgbClr val="C8C9C8"/>
-                      </a:solidFill>
-                      <a:prstDash val="solid"/>
-                      <a:round/>
-                      <a:headEnd type="none" w="med" len="med"/>
-                      <a:tailEnd type="none" w="med" len="med"/>
-                    </a:lnR>
-                    <a:lnT w="12700" cap="flat" cmpd="sng" algn="ctr">
-                      <a:solidFill>
-                        <a:srgbClr val="1D323C"/>
-                      </a:solidFill>
-                      <a:prstDash val="solid"/>
-                      <a:round/>
-                      <a:headEnd type="none" w="med" len="med"/>
-                      <a:tailEnd type="none" w="med" len="med"/>
-                    </a:lnT>
-                    <a:lnB w="12700" cap="flat" cmpd="sng" algn="ctr">
-                      <a:solidFill>
-                        <a:srgbClr val="C8C9C8"/>
-                      </a:solidFill>
-                      <a:prstDash val="solid"/>
-                      <a:round/>
-                      <a:headEnd type="none" w="med" len="med"/>
-                      <a:tailEnd type="none" w="med" len="med"/>
-                    </a:lnB>
-                  </a:tcPr>
-                </a:tc>
-                <a:tc>
-                  <a:txBody>
-                    <a:bodyPr/>
-                    <a:lstStyle/>
-                    <a:p>
-                      <a:pPr marL="0" indent="0" algn="r">
-                        <a:lnSpc>
-                          <a:spcPts val="1960"/>
-                        </a:lnSpc>
-                        <a:buNone/>
-                      </a:pPr>
-                      <a:r>
-                        <a:rPr lang="en-US" sz="1400" dirty="0">
-                          <a:solidFill>
-                            <a:srgbClr val="1F2A2E"/>
-                          </a:solidFill>
-                          <a:latin typeface="IBM Plex Sans" pitchFamily="34" charset="0"/>
-                          <a:ea typeface="IBM Plex Sans" pitchFamily="34" charset="-122"/>
-                          <a:cs typeface="IBM Plex Sans" pitchFamily="34" charset="-120"/>
-                        </a:rPr>
-                        <a:t>0,92</a:t>
-                      </a:r>
-                      <a:endParaRPr lang="en-US" sz="1400" dirty="0">
-                        <a:latin typeface="IBM Plex Sans" charset="0"/>
-                        <a:ea typeface="IBM Plex Sans" charset="0"/>
-                        <a:cs typeface="IBM Plex Sans" charset="0"/>
-                      </a:endParaRPr>
-                    </a:p>
-                  </a:txBody>
-                  <a:tcPr marL="62230" marR="62230" marT="62230" marB="62230">
-                    <a:lnL w="12700" cap="flat" cmpd="sng" algn="ctr">
-                      <a:solidFill>
-                        <a:srgbClr val="C8C9C8"/>
-                      </a:solidFill>
-                      <a:prstDash val="solid"/>
-                      <a:round/>
-                      <a:headEnd type="none" w="med" len="med"/>
-                      <a:tailEnd type="none" w="med" len="med"/>
-                    </a:lnL>
-                    <a:lnR w="12700" cap="flat" cmpd="sng" algn="ctr">
-                      <a:solidFill>
-                        <a:srgbClr val="C8C9C8"/>
-                      </a:solidFill>
-                      <a:prstDash val="solid"/>
-                      <a:round/>
-                      <a:headEnd type="none" w="med" len="med"/>
-                      <a:tailEnd type="none" w="med" len="med"/>
-                    </a:lnR>
-                    <a:lnT w="12700" cap="flat" cmpd="sng" algn="ctr">
-                      <a:solidFill>
-                        <a:srgbClr val="1D323C"/>
-                      </a:solidFill>
-                      <a:prstDash val="solid"/>
-                      <a:round/>
-                      <a:headEnd type="none" w="med" len="med"/>
-                      <a:tailEnd type="none" w="med" len="med"/>
-                    </a:lnT>
-                    <a:lnB w="12700" cap="flat" cmpd="sng" algn="ctr">
-                      <a:solidFill>
-                        <a:srgbClr val="C8C9C8"/>
-                      </a:solidFill>
-                      <a:prstDash val="solid"/>
-                      <a:round/>
-                      <a:headEnd type="none" w="med" len="med"/>
-                      <a:tailEnd type="none" w="med" len="med"/>
-                    </a:lnB>
-                  </a:tcPr>
-                </a:tc>
-                <a:tc>
-                  <a:txBody>
-                    <a:bodyPr/>
-                    <a:lstStyle/>
-                    <a:p>
-                      <a:pPr marL="0" indent="0" algn="r">
-                        <a:lnSpc>
-                          <a:spcPts val="1960"/>
-                        </a:lnSpc>
-                        <a:buNone/>
-                      </a:pPr>
-                      <a:r>
-                        <a:rPr lang="en-US" sz="1400" dirty="0">
-                          <a:solidFill>
-                            <a:srgbClr val="1F2A2E"/>
-                          </a:solidFill>
-                          <a:latin typeface="IBM Plex Sans" pitchFamily="34" charset="0"/>
-                          <a:ea typeface="IBM Plex Sans" pitchFamily="34" charset="-122"/>
-                          <a:cs typeface="IBM Plex Sans" pitchFamily="34" charset="-120"/>
-                        </a:rPr>
-                        <a:t>0,75</a:t>
-                      </a:r>
-                      <a:endParaRPr lang="en-US" sz="1400" dirty="0">
-                        <a:latin typeface="IBM Plex Sans" charset="0"/>
-                        <a:ea typeface="IBM Plex Sans" charset="0"/>
-                        <a:cs typeface="IBM Plex Sans" charset="0"/>
-                      </a:endParaRPr>
-                    </a:p>
-                  </a:txBody>
-                  <a:tcPr marL="62230" marR="62230" marT="62230" marB="62230">
-                    <a:lnL w="12700" cap="flat" cmpd="sng" algn="ctr">
-                      <a:solidFill>
-                        <a:srgbClr val="C8C9C8"/>
-                      </a:solidFill>
-                      <a:prstDash val="solid"/>
-                      <a:round/>
-                      <a:headEnd type="none" w="med" len="med"/>
-                      <a:tailEnd type="none" w="med" len="med"/>
-                    </a:lnL>
-                    <a:lnR w="12700" cap="flat" cmpd="sng" algn="ctr">
-                      <a:solidFill>
-                        <a:srgbClr val="C8C9C8"/>
-                      </a:solidFill>
-                      <a:prstDash val="solid"/>
-                      <a:round/>
-                      <a:headEnd type="none" w="med" len="med"/>
-                      <a:tailEnd type="none" w="med" len="med"/>
-                    </a:lnR>
-                    <a:lnT w="12700" cap="flat" cmpd="sng" algn="ctr">
-                      <a:solidFill>
-                        <a:srgbClr val="1D323C"/>
-                      </a:solidFill>
-                      <a:prstDash val="solid"/>
-                      <a:round/>
-                      <a:headEnd type="none" w="med" len="med"/>
-                      <a:tailEnd type="none" w="med" len="med"/>
-                    </a:lnT>
-                    <a:lnB w="12700" cap="flat" cmpd="sng" algn="ctr">
-                      <a:solidFill>
-                        <a:srgbClr val="C8C9C8"/>
-                      </a:solidFill>
-                      <a:prstDash val="solid"/>
-                      <a:round/>
-                      <a:headEnd type="none" w="med" len="med"/>
-                      <a:tailEnd type="none" w="med" len="med"/>
-                    </a:lnB>
-                  </a:tcPr>
-                </a:tc>
-                <a:extLst>
-                  <a:ext uri="{0D108BD9-81ED-4DB2-BD59-A6C34878D82A}">
-                    <a16:rowId xmlns:a16="http://schemas.microsoft.com/office/drawing/2014/main" val="10001"/>
-                  </a:ext>
-                </a:extLst>
-              </a:tr>
-              <a:tr h="386011">
-                <a:tc>
-                  <a:txBody>
-                    <a:bodyPr/>
-                    <a:lstStyle/>
-                    <a:p>
-                      <a:pPr marL="0" indent="0">
-                        <a:lnSpc>
-                          <a:spcPts val="1960"/>
-                        </a:lnSpc>
-                        <a:buNone/>
-                      </a:pPr>
-                      <a:r>
-                        <a:rPr lang="en-US" sz="1400" dirty="0">
-                          <a:solidFill>
-                            <a:srgbClr val="1F2A2E"/>
-                          </a:solidFill>
-                          <a:latin typeface="IBM Plex Sans" pitchFamily="34" charset="0"/>
-                          <a:ea typeface="IBM Plex Sans" pitchFamily="34" charset="-122"/>
-                          <a:cs typeface="IBM Plex Sans" pitchFamily="34" charset="-120"/>
-                        </a:rPr>
-                        <a:t>Précision</a:t>
-                      </a:r>
-                      <a:endParaRPr lang="en-US" sz="1400" dirty="0">
-                        <a:latin typeface="IBM Plex Sans" charset="0"/>
-                        <a:ea typeface="IBM Plex Sans" charset="0"/>
-                        <a:cs typeface="IBM Plex Sans" charset="0"/>
-                      </a:endParaRPr>
-                    </a:p>
-                  </a:txBody>
-                  <a:tcPr marL="62230" marR="62230" marT="62230" marB="62230">
-                    <a:lnL w="0" cap="flat" cmpd="sng" algn="ctr">
-                      <a:noFill/>
-                    </a:lnL>
-                    <a:lnR w="12700" cap="flat" cmpd="sng" algn="ctr">
-                      <a:solidFill>
-                        <a:srgbClr val="C8C9C8"/>
-                      </a:solidFill>
-                      <a:prstDash val="solid"/>
-                      <a:round/>
-                      <a:headEnd type="none" w="med" len="med"/>
-                      <a:tailEnd type="none" w="med" len="med"/>
-                    </a:lnR>
-                    <a:lnT w="12700" cap="flat" cmpd="sng" algn="ctr">
-                      <a:solidFill>
-                        <a:srgbClr val="C8C9C8"/>
-                      </a:solidFill>
-                      <a:prstDash val="solid"/>
-                      <a:round/>
-                      <a:headEnd type="none" w="med" len="med"/>
-                      <a:tailEnd type="none" w="med" len="med"/>
-                    </a:lnT>
-                    <a:lnB w="12700" cap="flat" cmpd="sng" algn="ctr">
-                      <a:solidFill>
-                        <a:srgbClr val="C8C9C8"/>
-                      </a:solidFill>
-                      <a:prstDash val="solid"/>
-                      <a:round/>
-                      <a:headEnd type="none" w="med" len="med"/>
-                      <a:tailEnd type="none" w="med" len="med"/>
-                    </a:lnB>
-                  </a:tcPr>
-                </a:tc>
-                <a:tc>
-                  <a:txBody>
-                    <a:bodyPr/>
-                    <a:lstStyle/>
-                    <a:p>
-                      <a:pPr marL="0" indent="0" algn="r">
-                        <a:lnSpc>
-                          <a:spcPts val="1960"/>
-                        </a:lnSpc>
-                        <a:buNone/>
-                      </a:pPr>
-                      <a:r>
-                        <a:rPr lang="en-US" sz="1400" dirty="0">
-                          <a:solidFill>
-                            <a:srgbClr val="1F2A2E"/>
-                          </a:solidFill>
-                          <a:latin typeface="IBM Plex Sans" pitchFamily="34" charset="0"/>
-                          <a:ea typeface="IBM Plex Sans" pitchFamily="34" charset="-122"/>
-                          <a:cs typeface="IBM Plex Sans" pitchFamily="34" charset="-120"/>
-                        </a:rPr>
-                        <a:t>0,41</a:t>
-                      </a:r>
-                      <a:endParaRPr lang="en-US" sz="1400" dirty="0">
-                        <a:latin typeface="IBM Plex Sans" charset="0"/>
-                        <a:ea typeface="IBM Plex Sans" charset="0"/>
-                        <a:cs typeface="IBM Plex Sans" charset="0"/>
-                      </a:endParaRPr>
-                    </a:p>
-                  </a:txBody>
-                  <a:tcPr marL="62230" marR="62230" marT="62230" marB="62230">
-                    <a:lnL w="12700" cap="flat" cmpd="sng" algn="ctr">
-                      <a:solidFill>
-                        <a:srgbClr val="C8C9C8"/>
-                      </a:solidFill>
-                      <a:prstDash val="solid"/>
-                      <a:round/>
-                      <a:headEnd type="none" w="med" len="med"/>
-                      <a:tailEnd type="none" w="med" len="med"/>
-                    </a:lnL>
-                    <a:lnR w="12700" cap="flat" cmpd="sng" algn="ctr">
-                      <a:solidFill>
-                        <a:srgbClr val="C8C9C8"/>
-                      </a:solidFill>
-                      <a:prstDash val="solid"/>
-                      <a:round/>
-                      <a:headEnd type="none" w="med" len="med"/>
-                      <a:tailEnd type="none" w="med" len="med"/>
-                    </a:lnR>
-                    <a:lnT w="12700" cap="flat" cmpd="sng" algn="ctr">
-                      <a:solidFill>
-                        <a:srgbClr val="C8C9C8"/>
-                      </a:solidFill>
-                      <a:prstDash val="solid"/>
-                      <a:round/>
-                      <a:headEnd type="none" w="med" len="med"/>
-                      <a:tailEnd type="none" w="med" len="med"/>
-                    </a:lnT>
-                    <a:lnB w="12700" cap="flat" cmpd="sng" algn="ctr">
-                      <a:solidFill>
-                        <a:srgbClr val="C8C9C8"/>
-                      </a:solidFill>
-                      <a:prstDash val="solid"/>
-                      <a:round/>
-                      <a:headEnd type="none" w="med" len="med"/>
-                      <a:tailEnd type="none" w="med" len="med"/>
-                    </a:lnB>
-                  </a:tcPr>
-                </a:tc>
-                <a:tc>
-                  <a:txBody>
-                    <a:bodyPr/>
-                    <a:lstStyle/>
-                    <a:p>
-                      <a:pPr marL="0" indent="0" algn="r">
-                        <a:lnSpc>
-                          <a:spcPts val="1960"/>
-                        </a:lnSpc>
-                        <a:buNone/>
-                      </a:pPr>
-                      <a:r>
-                        <a:rPr lang="en-US" sz="1400" dirty="0">
-                          <a:solidFill>
-                            <a:srgbClr val="1F2A2E"/>
-                          </a:solidFill>
-                          <a:latin typeface="IBM Plex Sans" pitchFamily="34" charset="0"/>
-                          <a:ea typeface="IBM Plex Sans" pitchFamily="34" charset="-122"/>
-                          <a:cs typeface="IBM Plex Sans" pitchFamily="34" charset="-120"/>
-                        </a:rPr>
-                        <a:t>0,41</a:t>
-                      </a:r>
-                      <a:endParaRPr lang="en-US" sz="1400" dirty="0">
-                        <a:latin typeface="IBM Plex Sans" charset="0"/>
-                        <a:ea typeface="IBM Plex Sans" charset="0"/>
-                        <a:cs typeface="IBM Plex Sans" charset="0"/>
-                      </a:endParaRPr>
-                    </a:p>
-                  </a:txBody>
-                  <a:tcPr marL="62230" marR="62230" marT="62230" marB="62230">
-                    <a:lnL w="12700" cap="flat" cmpd="sng" algn="ctr">
-                      <a:solidFill>
-                        <a:srgbClr val="C8C9C8"/>
-                      </a:solidFill>
-                      <a:prstDash val="solid"/>
-                      <a:round/>
-                      <a:headEnd type="none" w="med" len="med"/>
-                      <a:tailEnd type="none" w="med" len="med"/>
-                    </a:lnL>
-                    <a:lnR w="12700" cap="flat" cmpd="sng" algn="ctr">
-                      <a:solidFill>
-                        <a:srgbClr val="C8C9C8"/>
-                      </a:solidFill>
-                      <a:prstDash val="solid"/>
-                      <a:round/>
-                      <a:headEnd type="none" w="med" len="med"/>
-                      <a:tailEnd type="none" w="med" len="med"/>
-                    </a:lnR>
-                    <a:lnT w="12700" cap="flat" cmpd="sng" algn="ctr">
-                      <a:solidFill>
-                        <a:srgbClr val="C8C9C8"/>
-                      </a:solidFill>
-                      <a:prstDash val="solid"/>
-                      <a:round/>
-                      <a:headEnd type="none" w="med" len="med"/>
-                      <a:tailEnd type="none" w="med" len="med"/>
-                    </a:lnT>
-                    <a:lnB w="12700" cap="flat" cmpd="sng" algn="ctr">
-                      <a:solidFill>
-                        <a:srgbClr val="C8C9C8"/>
-                      </a:solidFill>
-                      <a:prstDash val="solid"/>
-                      <a:round/>
-                      <a:headEnd type="none" w="med" len="med"/>
-                      <a:tailEnd type="none" w="med" len="med"/>
-                    </a:lnB>
-                  </a:tcPr>
-                </a:tc>
-                <a:extLst>
-                  <a:ext uri="{0D108BD9-81ED-4DB2-BD59-A6C34878D82A}">
-                    <a16:rowId xmlns:a16="http://schemas.microsoft.com/office/drawing/2014/main" val="10002"/>
-                  </a:ext>
-                </a:extLst>
-              </a:tr>
-              <a:tr h="386011">
-                <a:tc>
-                  <a:txBody>
-                    <a:bodyPr/>
-                    <a:lstStyle/>
-                    <a:p>
-                      <a:pPr marL="0" indent="0">
-                        <a:lnSpc>
-                          <a:spcPts val="1960"/>
-                        </a:lnSpc>
-                        <a:buNone/>
-                      </a:pPr>
-                      <a:r>
-                        <a:rPr lang="en-US" sz="1400" dirty="0">
-                          <a:solidFill>
-                            <a:srgbClr val="1F2A2E"/>
-                          </a:solidFill>
-                          <a:latin typeface="IBM Plex Sans" pitchFamily="34" charset="0"/>
-                          <a:ea typeface="IBM Plex Sans" pitchFamily="34" charset="-122"/>
-                          <a:cs typeface="IBM Plex Sans" pitchFamily="34" charset="-120"/>
-                        </a:rPr>
-                        <a:t>F1</a:t>
-                      </a:r>
-                      <a:endParaRPr lang="en-US" sz="1400" dirty="0">
-                        <a:latin typeface="IBM Plex Sans" charset="0"/>
-                        <a:ea typeface="IBM Plex Sans" charset="0"/>
-                        <a:cs typeface="IBM Plex Sans" charset="0"/>
-                      </a:endParaRPr>
-                    </a:p>
-                  </a:txBody>
-                  <a:tcPr marL="62230" marR="62230" marT="62230" marB="62230">
-                    <a:lnL w="0" cap="flat" cmpd="sng" algn="ctr">
-                      <a:noFill/>
-                    </a:lnL>
-                    <a:lnR w="12700" cap="flat" cmpd="sng" algn="ctr">
-                      <a:solidFill>
-                        <a:srgbClr val="C8C9C8"/>
-                      </a:solidFill>
-                      <a:prstDash val="solid"/>
-                      <a:round/>
-                      <a:headEnd type="none" w="med" len="med"/>
-                      <a:tailEnd type="none" w="med" len="med"/>
-                    </a:lnR>
-                    <a:lnT w="12700" cap="flat" cmpd="sng" algn="ctr">
-                      <a:solidFill>
-                        <a:srgbClr val="C8C9C8"/>
-                      </a:solidFill>
-                      <a:prstDash val="solid"/>
-                      <a:round/>
-                      <a:headEnd type="none" w="med" len="med"/>
-                      <a:tailEnd type="none" w="med" len="med"/>
-                    </a:lnT>
-                    <a:lnB w="12700" cap="flat" cmpd="sng" algn="ctr">
-                      <a:solidFill>
-                        <a:srgbClr val="C8C9C8"/>
-                      </a:solidFill>
-                      <a:prstDash val="solid"/>
-                      <a:round/>
-                      <a:headEnd type="none" w="med" len="med"/>
-                      <a:tailEnd type="none" w="med" len="med"/>
-                    </a:lnB>
-                  </a:tcPr>
-                </a:tc>
-                <a:tc>
-                  <a:txBody>
-                    <a:bodyPr/>
-                    <a:lstStyle/>
-                    <a:p>
-                      <a:pPr marL="0" indent="0" algn="r">
-                        <a:lnSpc>
-                          <a:spcPts val="1960"/>
-                        </a:lnSpc>
-                        <a:buNone/>
-                      </a:pPr>
-                      <a:r>
-                        <a:rPr lang="en-US" sz="1400" dirty="0">
-                          <a:solidFill>
-                            <a:srgbClr val="1F2A2E"/>
-                          </a:solidFill>
-                          <a:latin typeface="IBM Plex Sans" pitchFamily="34" charset="0"/>
-                          <a:ea typeface="IBM Plex Sans" pitchFamily="34" charset="-122"/>
-                          <a:cs typeface="IBM Plex Sans" pitchFamily="34" charset="-120"/>
-                        </a:rPr>
-                        <a:t>0,56</a:t>
-                      </a:r>
-                      <a:endParaRPr lang="en-US" sz="1400" dirty="0">
-                        <a:latin typeface="IBM Plex Sans" charset="0"/>
-                        <a:ea typeface="IBM Plex Sans" charset="0"/>
-                        <a:cs typeface="IBM Plex Sans" charset="0"/>
-                      </a:endParaRPr>
-                    </a:p>
-                  </a:txBody>
-                  <a:tcPr marL="62230" marR="62230" marT="62230" marB="62230">
-                    <a:lnL w="12700" cap="flat" cmpd="sng" algn="ctr">
-                      <a:solidFill>
-                        <a:srgbClr val="C8C9C8"/>
-                      </a:solidFill>
-                      <a:prstDash val="solid"/>
-                      <a:round/>
-                      <a:headEnd type="none" w="med" len="med"/>
-                      <a:tailEnd type="none" w="med" len="med"/>
-                    </a:lnL>
-                    <a:lnR w="12700" cap="flat" cmpd="sng" algn="ctr">
-                      <a:solidFill>
-                        <a:srgbClr val="C8C9C8"/>
-                      </a:solidFill>
-                      <a:prstDash val="solid"/>
-                      <a:round/>
-                      <a:headEnd type="none" w="med" len="med"/>
-                      <a:tailEnd type="none" w="med" len="med"/>
-                    </a:lnR>
-                    <a:lnT w="12700" cap="flat" cmpd="sng" algn="ctr">
-                      <a:solidFill>
-                        <a:srgbClr val="C8C9C8"/>
-                      </a:solidFill>
-                      <a:prstDash val="solid"/>
-                      <a:round/>
-                      <a:headEnd type="none" w="med" len="med"/>
-                      <a:tailEnd type="none" w="med" len="med"/>
-                    </a:lnT>
-                    <a:lnB w="12700" cap="flat" cmpd="sng" algn="ctr">
-                      <a:solidFill>
-                        <a:srgbClr val="C8C9C8"/>
-                      </a:solidFill>
-                      <a:prstDash val="solid"/>
-                      <a:round/>
-                      <a:headEnd type="none" w="med" len="med"/>
-                      <a:tailEnd type="none" w="med" len="med"/>
-                    </a:lnB>
-                  </a:tcPr>
-                </a:tc>
-                <a:tc>
-                  <a:txBody>
-                    <a:bodyPr/>
-                    <a:lstStyle/>
-                    <a:p>
-                      <a:pPr marL="0" indent="0" algn="r">
-                        <a:lnSpc>
-                          <a:spcPts val="1960"/>
-                        </a:lnSpc>
-                        <a:buNone/>
-                      </a:pPr>
-                      <a:r>
-                        <a:rPr lang="en-US" sz="1400" dirty="0">
-                          <a:solidFill>
-                            <a:srgbClr val="1F2A2E"/>
-                          </a:solidFill>
-                          <a:latin typeface="IBM Plex Sans" pitchFamily="34" charset="0"/>
-                          <a:ea typeface="IBM Plex Sans" pitchFamily="34" charset="-122"/>
-                          <a:cs typeface="IBM Plex Sans" pitchFamily="34" charset="-120"/>
-                        </a:rPr>
-                        <a:t>0,53</a:t>
-                      </a:r>
-                      <a:endParaRPr lang="en-US" sz="1400" dirty="0">
-                        <a:latin typeface="IBM Plex Sans" charset="0"/>
-                        <a:ea typeface="IBM Plex Sans" charset="0"/>
-                        <a:cs typeface="IBM Plex Sans" charset="0"/>
-                      </a:endParaRPr>
-                    </a:p>
-                  </a:txBody>
-                  <a:tcPr marL="62230" marR="62230" marT="62230" marB="62230">
-                    <a:lnL w="12700" cap="flat" cmpd="sng" algn="ctr">
-                      <a:solidFill>
-                        <a:srgbClr val="C8C9C8"/>
-                      </a:solidFill>
-                      <a:prstDash val="solid"/>
-                      <a:round/>
-                      <a:headEnd type="none" w="med" len="med"/>
-                      <a:tailEnd type="none" w="med" len="med"/>
-                    </a:lnL>
-                    <a:lnR w="12700" cap="flat" cmpd="sng" algn="ctr">
-                      <a:solidFill>
-                        <a:srgbClr val="C8C9C8"/>
-                      </a:solidFill>
-                      <a:prstDash val="solid"/>
-                      <a:round/>
-                      <a:headEnd type="none" w="med" len="med"/>
-                      <a:tailEnd type="none" w="med" len="med"/>
-                    </a:lnR>
-                    <a:lnT w="12700" cap="flat" cmpd="sng" algn="ctr">
-                      <a:solidFill>
-                        <a:srgbClr val="C8C9C8"/>
-                      </a:solidFill>
-                      <a:prstDash val="solid"/>
-                      <a:round/>
-                      <a:headEnd type="none" w="med" len="med"/>
-                      <a:tailEnd type="none" w="med" len="med"/>
-                    </a:lnT>
-                    <a:lnB w="12700" cap="flat" cmpd="sng" algn="ctr">
-                      <a:solidFill>
-                        <a:srgbClr val="C8C9C8"/>
-                      </a:solidFill>
-                      <a:prstDash val="solid"/>
-                      <a:round/>
-                      <a:headEnd type="none" w="med" len="med"/>
-                      <a:tailEnd type="none" w="med" len="med"/>
-                    </a:lnB>
-                  </a:tcPr>
-                </a:tc>
-                <a:extLst>
-                  <a:ext uri="{0D108BD9-81ED-4DB2-BD59-A6C34878D82A}">
-                    <a16:rowId xmlns:a16="http://schemas.microsoft.com/office/drawing/2014/main" val="10003"/>
-                  </a:ext>
-                </a:extLst>
-              </a:tr>
-            </a:tbl>
-          </a:graphicData>
-        </a:graphic>
-      </p:graphicFrame>
-      <p:sp>
-        <p:nvSpPr>
-          <p:cNvPr id="14" name="Text 11"/>
-          <p:cNvSpPr/>
-          <p:nvPr/>
-        </p:nvSpPr>
-        <p:spPr>
-          <a:xfrm>
-            <a:off x="5473700" y="3813423"/>
-            <a:ext cx="6082665" cy="452041"/>
-          </a:xfrm>
-          <a:prstGeom prst="rect">
-            <a:avLst/>
-          </a:prstGeom>
-          <a:noFill/>
-          <a:ln/>
-        </p:spPr>
-        <p:txBody>
-          <a:bodyPr wrap="square" lIns="0" tIns="0" rIns="0" bIns="0" rtlCol="0" anchor="t">
-            <a:normAutofit/>
-          </a:bodyPr>
-          <a:lstStyle/>
-          <a:p>
-            <a:pPr marL="0" indent="0" algn="l">
-              <a:lnSpc>
-                <a:spcPts val="1680"/>
-              </a:lnSpc>
-              <a:buNone/>
-            </a:pPr>
-            <a:r>
-              <a:rPr lang="en-US" sz="1200" dirty="0">
-                <a:solidFill>
-                  <a:srgbClr val="4A5A61"/>
-                </a:solidFill>
-                <a:latin typeface="IBM Plex Sans" pitchFamily="34" charset="0"/>
-                <a:ea typeface="IBM Plex Sans" pitchFamily="34" charset="-122"/>
-                <a:cs typeface="IBM Plex Sans" pitchFamily="34" charset="-120"/>
-              </a:rPr>
-              <a:t>Test : 38 produits, dont 12 en rupture. Random Forest via GridSearchCV (profondeur 3, 100 arbres).</a:t>
-            </a:r>
-            <a:endParaRPr lang="en-US" sz="1200" dirty="0"/>
-          </a:p>
-        </p:txBody>
-      </p:sp>
-      <p:sp>
-        <p:nvSpPr>
-          <p:cNvPr id="15" name="Shape 12"/>
-          <p:cNvSpPr/>
-          <p:nvPr/>
-        </p:nvSpPr>
-        <p:spPr>
-          <a:xfrm>
-            <a:off x="825500" y="4609951"/>
-            <a:ext cx="0" cy="462260"/>
-          </a:xfrm>
-          <a:prstGeom prst="line">
-            <a:avLst/>
-          </a:prstGeom>
-          <a:noFill/>
-          <a:ln w="25400">
-            <a:solidFill>
-              <a:srgbClr val="C0504D"/>
-            </a:solidFill>
-            <a:prstDash val="solid"/>
-          </a:ln>
-        </p:spPr>
-        <p:txBody>
-          <a:bodyPr/>
-          <a:lstStyle/>
-          <a:p>
-            <a:endParaRPr lang="fr-FR"/>
-          </a:p>
-        </p:txBody>
-      </p:sp>
-      <p:sp>
-        <p:nvSpPr>
-          <p:cNvPr id="16" name="Text 13"/>
-          <p:cNvSpPr/>
-          <p:nvPr/>
-        </p:nvSpPr>
-        <p:spPr>
-          <a:xfrm>
-            <a:off x="990600" y="4609951"/>
-            <a:ext cx="5101590" cy="487660"/>
-          </a:xfrm>
-          <a:prstGeom prst="rect">
-            <a:avLst/>
-          </a:prstGeom>
-          <a:noFill/>
-          <a:ln/>
-        </p:spPr>
-        <p:txBody>
-          <a:bodyPr wrap="square" lIns="0" tIns="0" rIns="0" bIns="0" rtlCol="0" anchor="t">
-            <a:normAutofit/>
-          </a:bodyPr>
-          <a:lstStyle/>
-          <a:p>
-            <a:pPr marL="0" indent="0" algn="l">
-              <a:lnSpc>
-                <a:spcPts val="1820"/>
-              </a:lnSpc>
-              <a:buNone/>
-            </a:pPr>
-            <a:r>
-              <a:rPr lang="en-US" sz="1300" b="1" dirty="0">
-                <a:solidFill>
-                  <a:srgbClr val="1F2A2E"/>
-                </a:solidFill>
-                <a:latin typeface="IBM Plex Sans" pitchFamily="34" charset="0"/>
-                <a:ea typeface="IBM Plex Sans" pitchFamily="34" charset="-122"/>
-                <a:cs typeface="IBM Plex Sans" pitchFamily="34" charset="-120"/>
-              </a:rPr>
-              <a:t>Fuite de données corrigée</a:t>
-            </a:r>
-            <a:r>
-              <a:rPr lang="en-US" sz="1300" dirty="0">
-                <a:solidFill>
-                  <a:srgbClr val="1F2A2E"/>
-                </a:solidFill>
-                <a:latin typeface="IBM Plex Sans" pitchFamily="34" charset="0"/>
-                <a:ea typeface="IBM Plex Sans" pitchFamily="34" charset="-122"/>
-                <a:cs typeface="IBM Plex Sans" pitchFamily="34" charset="-120"/>
-              </a:rPr>
-              <a:t> : le F1 de 0,89 venait de 144 produits sans stock classés d'office en rupture.</a:t>
-            </a:r>
-            <a:endParaRPr lang="en-US" sz="1300" dirty="0"/>
-          </a:p>
-        </p:txBody>
-      </p:sp>
-      <p:sp>
-        <p:nvSpPr>
-          <p:cNvPr id="17" name="Shape 14"/>
-          <p:cNvSpPr/>
-          <p:nvPr/>
-        </p:nvSpPr>
-        <p:spPr>
-          <a:xfrm>
-            <a:off x="6261100" y="4609951"/>
-            <a:ext cx="0" cy="462260"/>
-          </a:xfrm>
-          <a:prstGeom prst="line">
-            <a:avLst/>
-          </a:prstGeom>
-          <a:noFill/>
-          <a:ln w="25400">
-            <a:solidFill>
-              <a:srgbClr val="2F5D6E"/>
-            </a:solidFill>
-            <a:prstDash val="solid"/>
-          </a:ln>
-        </p:spPr>
-        <p:txBody>
-          <a:bodyPr/>
-          <a:lstStyle/>
-          <a:p>
-            <a:endParaRPr lang="fr-FR"/>
-          </a:p>
-        </p:txBody>
-      </p:sp>
-      <p:sp>
-        <p:nvSpPr>
-          <p:cNvPr id="18" name="Text 15"/>
-          <p:cNvSpPr/>
-          <p:nvPr/>
-        </p:nvSpPr>
-        <p:spPr>
-          <a:xfrm>
-            <a:off x="6426200" y="4609951"/>
-            <a:ext cx="5101590" cy="487660"/>
-          </a:xfrm>
-          <a:prstGeom prst="rect">
-            <a:avLst/>
-          </a:prstGeom>
-          <a:noFill/>
-          <a:ln/>
-        </p:spPr>
-        <p:txBody>
-          <a:bodyPr wrap="square" lIns="0" tIns="0" rIns="0" bIns="0" rtlCol="0" anchor="t">
-            <a:normAutofit/>
-          </a:bodyPr>
-          <a:lstStyle/>
-          <a:p>
-            <a:pPr marL="0" indent="0" algn="l">
-              <a:lnSpc>
-                <a:spcPts val="1820"/>
-              </a:lnSpc>
-              <a:buNone/>
-            </a:pPr>
-            <a:r>
-              <a:rPr lang="en-US" sz="1300" b="1" dirty="0">
-                <a:solidFill>
-                  <a:srgbClr val="1F2A2E"/>
-                </a:solidFill>
-                <a:latin typeface="IBM Plex Sans" pitchFamily="34" charset="0"/>
-                <a:ea typeface="IBM Plex Sans" pitchFamily="34" charset="-122"/>
-                <a:cs typeface="IBM Plex Sans" pitchFamily="34" charset="-120"/>
-              </a:rPr>
-              <a:t>Usage</a:t>
-            </a:r>
-            <a:r>
-              <a:rPr lang="en-US" sz="1300" dirty="0">
-                <a:solidFill>
-                  <a:srgbClr val="1F2A2E"/>
-                </a:solidFill>
-                <a:latin typeface="IBM Plex Sans" pitchFamily="34" charset="0"/>
-                <a:ea typeface="IBM Plex Sans" pitchFamily="34" charset="-122"/>
-                <a:cs typeface="IBM Plex Sans" pitchFamily="34" charset="-120"/>
-              </a:rPr>
-              <a:t> : filtre d'alerte, qui détecte 11 ruptures sur 12, au prix de fausses alertes. Variable clé : vitesse de vente.</a:t>
-            </a:r>
-            <a:endParaRPr lang="en-US" sz="1300" dirty="0"/>
-          </a:p>
-        </p:txBody>
-      </p:sp>
-      <p:sp>
-        <p:nvSpPr>
-          <p:cNvPr id="19" name="Text 16"/>
-          <p:cNvSpPr/>
-          <p:nvPr/>
-        </p:nvSpPr>
-        <p:spPr>
-          <a:xfrm>
-            <a:off x="812800" y="6238280"/>
-            <a:ext cx="7848600" cy="238720"/>
-          </a:xfrm>
-          <a:prstGeom prst="rect">
-            <a:avLst/>
-          </a:prstGeom>
-          <a:noFill/>
-          <a:ln/>
-        </p:spPr>
-        <p:txBody>
-          <a:bodyPr wrap="square" lIns="0" tIns="0" rIns="0" bIns="0" rtlCol="0" anchor="t">
-            <a:normAutofit/>
-          </a:bodyPr>
-          <a:lstStyle/>
-          <a:p>
-            <a:pPr marL="0" indent="0" algn="l">
-              <a:lnSpc>
-                <a:spcPts val="1680"/>
-              </a:lnSpc>
-              <a:buNone/>
-            </a:pPr>
-            <a:r>
-              <a:rPr lang="en-US" sz="1200" dirty="0">
-                <a:solidFill>
-                  <a:srgbClr val="5C6B73"/>
-                </a:solidFill>
-                <a:latin typeface="IBM Plex Sans" pitchFamily="34" charset="0"/>
-                <a:ea typeface="IBM Plex Sans" pitchFamily="34" charset="-122"/>
-                <a:cs typeface="IBM Plex Sans" pitchFamily="34" charset="-120"/>
-              </a:rPr>
-              <a:t>AdventureWorks · Conclusions</a:t>
-            </a:r>
-            <a:endParaRPr lang="en-US" sz="1200" dirty="0"/>
-          </a:p>
-        </p:txBody>
-      </p:sp>
-      <p:sp>
-        <p:nvSpPr>
-          <p:cNvPr id="20" name="Text 17"/>
-          <p:cNvSpPr/>
-          <p:nvPr/>
-        </p:nvSpPr>
-        <p:spPr>
-          <a:xfrm>
-            <a:off x="10058400" y="6238280"/>
-            <a:ext cx="1320800" cy="238720"/>
-          </a:xfrm>
-          <a:prstGeom prst="rect">
-            <a:avLst/>
-          </a:prstGeom>
-          <a:noFill/>
-          <a:ln/>
-        </p:spPr>
-        <p:txBody>
-          <a:bodyPr wrap="square" lIns="0" tIns="0" rIns="0" bIns="0" rtlCol="0" anchor="t">
-            <a:normAutofit/>
-          </a:bodyPr>
-          <a:lstStyle/>
-          <a:p>
-            <a:pPr marL="0" indent="0" algn="r">
-              <a:lnSpc>
-                <a:spcPts val="1680"/>
-              </a:lnSpc>
-              <a:buNone/>
-            </a:pPr>
-            <a:r>
-              <a:rPr lang="en-US" sz="1200" dirty="0">
-                <a:solidFill>
-                  <a:srgbClr val="5C6B73"/>
-                </a:solidFill>
-                <a:latin typeface="IBM Plex Sans" pitchFamily="34" charset="0"/>
-                <a:ea typeface="IBM Plex Sans" pitchFamily="34" charset="-122"/>
-                <a:cs typeface="IBM Plex Sans" pitchFamily="34" charset="-120"/>
-              </a:rPr>
-              <a:t>17</a:t>
-            </a:r>
-            <a:endParaRPr lang="en-US" sz="1200" dirty="0"/>
-          </a:p>
-        </p:txBody>
-      </p:sp>
-    </p:spTree>
-  </p:cSld>
-  <p:clrMapOvr>
-    <a:masterClrMapping/>
-  </p:clrMapOvr>
-</p:sld>
-</file>
-
-<file path=ppt/slides/slide18.xml><?xml version="1.0" encoding="utf-8"?>
 <p:sld xmlns:a="http://schemas.openxmlformats.org/drawingml/2006/main" xmlns:r="http://schemas.openxmlformats.org/officeDocument/2006/relationships" xmlns:p="http://schemas.openxmlformats.org/presentationml/2006/main">
   <p:cSld name="Slide 18">
     <p:bg>
@@ -13331,26 +11715,13 @@
         </p:spPr>
         <p:txBody>
           <a:bodyPr wrap="square" lIns="0" tIns="0" rIns="0" bIns="0" rtlCol="0" anchor="t">
-            <a:normAutofit/>
-          </a:bodyPr>
-          <a:lstStyle/>
-          <a:p>
-            <a:pPr marL="0" indent="0" algn="l">
-              <a:lnSpc>
-                <a:spcPts val="1820"/>
-              </a:lnSpc>
-              <a:buNone/>
-            </a:pPr>
-            <a:r>
-              <a:rPr lang="en-US" sz="1300" dirty="0">
-                <a:solidFill>
-                  <a:srgbClr val="4A5A61"/>
-                </a:solidFill>
-                <a:latin typeface="IBM Plex Sans" pitchFamily="34" charset="0"/>
-                <a:ea typeface="IBM Plex Sans" pitchFamily="34" charset="-122"/>
-                <a:cs typeface="IBM Plex Sans" pitchFamily="34" charset="-120"/>
-              </a:rPr>
-              <a:t>Pas d'historique des coûts : la marge du dashboard ne reflète pas les prix réellement payés.</a:t>
+            <a:normAutofit fontScale="92500" lnSpcReduction="20000"/>
+          </a:bodyPr>
+          <a:lstStyle/>
+          <a:p>
+            <a:r>
+              <a:rPr lang="fr-FR" sz="1400" dirty="0"/>
+              <a:t>Pas d’historique des coûts : la marge globale est calculée au coût standard actuel ; le prix réel n’est mesurable que sur les produits revendus.</a:t>
             </a:r>
             <a:endParaRPr lang="en-US" sz="1300" dirty="0"/>
           </a:p>
@@ -13508,7 +11879,7 @@
           <a:bodyPr/>
           <a:lstStyle/>
           <a:p>
-            <a:endParaRPr lang="fr-FR"/>
+            <a:endParaRPr lang="fr-FR" dirty="0"/>
           </a:p>
         </p:txBody>
       </p:sp>
@@ -13550,7 +11921,18 @@
                 <a:ea typeface="Rubik" pitchFamily="34" charset="-122"/>
                 <a:cs typeface="Rubik" pitchFamily="34" charset="-120"/>
               </a:rPr>
-              <a:t>Nomenclature testée</a:t>
+              <a:t>Nomenclature </a:t>
+            </a:r>
+            <a:r>
+              <a:rPr lang="en-US" sz="1600" b="1" dirty="0" err="1">
+                <a:solidFill>
+                  <a:srgbClr val="1F2A2E"/>
+                </a:solidFill>
+                <a:latin typeface="Rubik" pitchFamily="34" charset="0"/>
+                <a:ea typeface="Rubik" pitchFamily="34" charset="-122"/>
+                <a:cs typeface="Rubik" pitchFamily="34" charset="-120"/>
+              </a:rPr>
+              <a:t>manquante</a:t>
             </a:r>
             <a:endParaRPr lang="en-US" sz="1600" dirty="0"/>
           </a:p>
@@ -13594,7 +11976,7 @@
                 <a:ea typeface="IBM Plex Sans" pitchFamily="34" charset="-122"/>
                 <a:cs typeface="IBM Plex Sans" pitchFamily="34" charset="-120"/>
               </a:rPr>
-              <a:t>Achats en cartons ou bidons, nomenclature en unités : aucun facteur de conversion disponible.</a:t>
+              <a:t>Achats en cartons ou bidons, nomenclature : aucun facteur de conversion disponible.</a:t>
             </a:r>
             <a:endParaRPr lang="en-US" sz="1300" dirty="0"/>
           </a:p>
@@ -13925,7 +12307,7 @@
 </p:sld>
 </file>
 
-<file path=ppt/slides/slide19.xml><?xml version="1.0" encoding="utf-8"?>
+<file path=ppt/slides/slide18.xml><?xml version="1.0" encoding="utf-8"?>
 <p:sld xmlns:a="http://schemas.openxmlformats.org/drawingml/2006/main" xmlns:r="http://schemas.openxmlformats.org/officeDocument/2006/relationships" xmlns:p="http://schemas.openxmlformats.org/presentationml/2006/main">
   <p:cSld>
     <p:spTree>
@@ -14713,6 +13095,254 @@
         <p14:creationId xmlns:p14="http://schemas.microsoft.com/office/powerpoint/2010/main" val="1160205126"/>
       </p:ext>
     </p:extLst>
+  </p:cSld>
+  <p:clrMapOvr>
+    <a:masterClrMapping/>
+  </p:clrMapOvr>
+</p:sld>
+</file>
+
+<file path=ppt/slides/slide19.xml><?xml version="1.0" encoding="utf-8"?>
+<p:sld xmlns:a="http://schemas.openxmlformats.org/drawingml/2006/main" xmlns:r="http://schemas.openxmlformats.org/officeDocument/2006/relationships" xmlns:p="http://schemas.openxmlformats.org/presentationml/2006/main">
+  <p:cSld name="Slide 19">
+    <p:bg>
+      <p:bgPr>
+        <a:solidFill>
+          <a:srgbClr val="1F3B47"/>
+        </a:solidFill>
+        <a:effectLst/>
+      </p:bgPr>
+    </p:bg>
+    <p:spTree>
+      <p:nvGrpSpPr>
+        <p:cNvPr id="1" name=""/>
+        <p:cNvGrpSpPr/>
+        <p:nvPr/>
+      </p:nvGrpSpPr>
+      <p:grpSpPr>
+        <a:xfrm>
+          <a:off x="0" y="0"/>
+          <a:ext cx="0" cy="0"/>
+          <a:chOff x="0" y="0"/>
+          <a:chExt cx="0" cy="0"/>
+        </a:xfrm>
+      </p:grpSpPr>
+      <p:sp>
+        <p:nvSpPr>
+          <p:cNvPr id="2" name="Shape 0"/>
+          <p:cNvSpPr/>
+          <p:nvPr/>
+        </p:nvSpPr>
+        <p:spPr>
+          <a:xfrm>
+            <a:off x="812800" y="812800"/>
+            <a:ext cx="762000" cy="50800"/>
+          </a:xfrm>
+          <a:prstGeom prst="roundRect">
+            <a:avLst>
+              <a:gd name="adj" fmla="val 50000"/>
+            </a:avLst>
+          </a:prstGeom>
+          <a:solidFill>
+            <a:srgbClr val="7DBE9A"/>
+          </a:solidFill>
+          <a:ln/>
+        </p:spPr>
+        <p:txBody>
+          <a:bodyPr/>
+          <a:lstStyle/>
+          <a:p>
+            <a:endParaRPr lang="fr-FR"/>
+          </a:p>
+        </p:txBody>
+      </p:sp>
+      <p:sp>
+        <p:nvSpPr>
+          <p:cNvPr id="3" name="Text 1"/>
+          <p:cNvSpPr>
+            <a:spLocks noGrp="1"/>
+          </p:cNvSpPr>
+          <p:nvPr>
+            <p:ph type="title"/>
+          </p:nvPr>
+        </p:nvSpPr>
+        <p:spPr>
+          <a:xfrm>
+            <a:off x="812800" y="2440980"/>
+            <a:ext cx="10883392" cy="863600"/>
+          </a:xfrm>
+          <a:prstGeom prst="rect">
+            <a:avLst/>
+          </a:prstGeom>
+          <a:noFill/>
+          <a:ln/>
+        </p:spPr>
+        <p:txBody>
+          <a:bodyPr wrap="square" lIns="0" tIns="0" rIns="0" bIns="0" rtlCol="0" anchor="t">
+            <a:normAutofit/>
+          </a:bodyPr>
+          <a:lstStyle/>
+          <a:p>
+            <a:pPr marL="0" indent="0" algn="l">
+              <a:lnSpc>
+                <a:spcPts val="6600"/>
+              </a:lnSpc>
+              <a:buNone/>
+            </a:pPr>
+            <a:r>
+              <a:rPr lang="en-US" sz="6000" b="1" i="0" dirty="0">
+                <a:solidFill>
+                  <a:srgbClr val="F4F6F5"/>
+                </a:solidFill>
+                <a:latin typeface="Rubik" pitchFamily="34" charset="0"/>
+                <a:ea typeface="Rubik" pitchFamily="34" charset="-122"/>
+                <a:cs typeface="Rubik" pitchFamily="34" charset="-120"/>
+              </a:rPr>
+              <a:t>Merci </a:t>
+            </a:r>
+            <a:r>
+              <a:rPr lang="fr-FR" sz="6000" b="1" i="0" dirty="0">
+                <a:solidFill>
+                  <a:srgbClr val="F4F6F5"/>
+                </a:solidFill>
+                <a:latin typeface="Rubik" pitchFamily="34" charset="0"/>
+                <a:ea typeface="Rubik" pitchFamily="34" charset="-122"/>
+                <a:cs typeface="Rubik" pitchFamily="34" charset="-120"/>
+              </a:rPr>
+              <a:t>à tous</a:t>
+            </a:r>
+            <a:endParaRPr lang="en-US" sz="6000" dirty="0"/>
+          </a:p>
+        </p:txBody>
+      </p:sp>
+      <p:sp>
+        <p:nvSpPr>
+          <p:cNvPr id="4" name="Text 2"/>
+          <p:cNvSpPr/>
+          <p:nvPr/>
+        </p:nvSpPr>
+        <p:spPr>
+          <a:xfrm>
+            <a:off x="812800" y="3431580"/>
+            <a:ext cx="10883392" cy="452090"/>
+          </a:xfrm>
+          <a:prstGeom prst="rect">
+            <a:avLst/>
+          </a:prstGeom>
+          <a:noFill/>
+          <a:ln/>
+        </p:spPr>
+        <p:txBody>
+          <a:bodyPr wrap="square" lIns="0" tIns="0" rIns="0" bIns="0" rtlCol="0" anchor="t">
+            <a:normAutofit/>
+          </a:bodyPr>
+          <a:lstStyle/>
+          <a:p>
+            <a:pPr marL="0" indent="0" algn="l">
+              <a:lnSpc>
+                <a:spcPts val="3360"/>
+              </a:lnSpc>
+              <a:buNone/>
+            </a:pPr>
+            <a:endParaRPr lang="en-US" sz="2400" dirty="0"/>
+          </a:p>
+        </p:txBody>
+      </p:sp>
+      <p:sp>
+        <p:nvSpPr>
+          <p:cNvPr id="5" name="Text 3"/>
+          <p:cNvSpPr/>
+          <p:nvPr/>
+        </p:nvSpPr>
+        <p:spPr>
+          <a:xfrm>
+            <a:off x="812800" y="5435650"/>
+            <a:ext cx="10883392" cy="309860"/>
+          </a:xfrm>
+          <a:prstGeom prst="rect">
+            <a:avLst/>
+          </a:prstGeom>
+          <a:noFill/>
+          <a:ln/>
+        </p:spPr>
+        <p:txBody>
+          <a:bodyPr wrap="square" lIns="0" tIns="0" rIns="0" bIns="0" rtlCol="0" anchor="t">
+            <a:normAutofit/>
+          </a:bodyPr>
+          <a:lstStyle/>
+          <a:p>
+            <a:pPr marL="0" indent="0" algn="l">
+              <a:lnSpc>
+                <a:spcPts val="2240"/>
+              </a:lnSpc>
+              <a:buNone/>
+            </a:pPr>
+            <a:r>
+              <a:rPr lang="en-US" sz="1600" b="1" dirty="0">
+                <a:solidFill>
+                  <a:srgbClr val="F4F6F5"/>
+                </a:solidFill>
+                <a:latin typeface="IBM Plex Sans" pitchFamily="34" charset="0"/>
+                <a:ea typeface="IBM Plex Sans" pitchFamily="34" charset="-122"/>
+                <a:cs typeface="IBM Plex Sans" pitchFamily="34" charset="-120"/>
+              </a:rPr>
+              <a:t>Xiaoqing ZHOU GRANDCOING</a:t>
+            </a:r>
+            <a:endParaRPr lang="en-US" sz="1600" dirty="0"/>
+          </a:p>
+        </p:txBody>
+      </p:sp>
+      <p:sp>
+        <p:nvSpPr>
+          <p:cNvPr id="6" name="Text 4"/>
+          <p:cNvSpPr/>
+          <p:nvPr/>
+        </p:nvSpPr>
+        <p:spPr>
+          <a:xfrm>
+            <a:off x="812800" y="5796310"/>
+            <a:ext cx="10883392" cy="274290"/>
+          </a:xfrm>
+          <a:prstGeom prst="rect">
+            <a:avLst/>
+          </a:prstGeom>
+          <a:noFill/>
+          <a:ln/>
+        </p:spPr>
+        <p:txBody>
+          <a:bodyPr wrap="square" lIns="0" tIns="0" rIns="0" bIns="0" rtlCol="0" anchor="t">
+            <a:normAutofit/>
+          </a:bodyPr>
+          <a:lstStyle/>
+          <a:p>
+            <a:pPr>
+              <a:lnSpc>
+                <a:spcPts val="1960"/>
+              </a:lnSpc>
+            </a:pPr>
+            <a:r>
+              <a:rPr lang="en-US" sz="1400" dirty="0" err="1">
+                <a:solidFill>
+                  <a:srgbClr val="BFD8D5"/>
+                </a:solidFill>
+                <a:latin typeface="IBM Plex Sans" pitchFamily="34" charset="0"/>
+              </a:rPr>
+              <a:t>Portefolio</a:t>
+            </a:r>
+            <a:r>
+              <a:rPr lang="en-US" sz="1400" dirty="0">
+                <a:solidFill>
+                  <a:srgbClr val="BFD8D5"/>
+                </a:solidFill>
+                <a:latin typeface="IBM Plex Sans" pitchFamily="34" charset="0"/>
+              </a:rPr>
+              <a:t> : https://xiaoqinggdc.github.io/</a:t>
+            </a:r>
+            <a:endParaRPr lang="en-US" sz="1400" dirty="0"/>
+          </a:p>
+        </p:txBody>
+      </p:sp>
+    </p:spTree>
   </p:cSld>
   <p:clrMapOvr>
     <a:masterClrMapping/>
@@ -15466,254 +14096,6 @@
               <a:t>02</a:t>
             </a:r>
             <a:endParaRPr lang="en-US" sz="1200" dirty="0"/>
-          </a:p>
-        </p:txBody>
-      </p:sp>
-    </p:spTree>
-  </p:cSld>
-  <p:clrMapOvr>
-    <a:masterClrMapping/>
-  </p:clrMapOvr>
-</p:sld>
-</file>
-
-<file path=ppt/slides/slide20.xml><?xml version="1.0" encoding="utf-8"?>
-<p:sld xmlns:a="http://schemas.openxmlformats.org/drawingml/2006/main" xmlns:r="http://schemas.openxmlformats.org/officeDocument/2006/relationships" xmlns:p="http://schemas.openxmlformats.org/presentationml/2006/main">
-  <p:cSld name="Slide 19">
-    <p:bg>
-      <p:bgPr>
-        <a:solidFill>
-          <a:srgbClr val="1F3B47"/>
-        </a:solidFill>
-        <a:effectLst/>
-      </p:bgPr>
-    </p:bg>
-    <p:spTree>
-      <p:nvGrpSpPr>
-        <p:cNvPr id="1" name=""/>
-        <p:cNvGrpSpPr/>
-        <p:nvPr/>
-      </p:nvGrpSpPr>
-      <p:grpSpPr>
-        <a:xfrm>
-          <a:off x="0" y="0"/>
-          <a:ext cx="0" cy="0"/>
-          <a:chOff x="0" y="0"/>
-          <a:chExt cx="0" cy="0"/>
-        </a:xfrm>
-      </p:grpSpPr>
-      <p:sp>
-        <p:nvSpPr>
-          <p:cNvPr id="2" name="Shape 0"/>
-          <p:cNvSpPr/>
-          <p:nvPr/>
-        </p:nvSpPr>
-        <p:spPr>
-          <a:xfrm>
-            <a:off x="812800" y="812800"/>
-            <a:ext cx="762000" cy="50800"/>
-          </a:xfrm>
-          <a:prstGeom prst="roundRect">
-            <a:avLst>
-              <a:gd name="adj" fmla="val 50000"/>
-            </a:avLst>
-          </a:prstGeom>
-          <a:solidFill>
-            <a:srgbClr val="7DBE9A"/>
-          </a:solidFill>
-          <a:ln/>
-        </p:spPr>
-        <p:txBody>
-          <a:bodyPr/>
-          <a:lstStyle/>
-          <a:p>
-            <a:endParaRPr lang="fr-FR"/>
-          </a:p>
-        </p:txBody>
-      </p:sp>
-      <p:sp>
-        <p:nvSpPr>
-          <p:cNvPr id="3" name="Text 1"/>
-          <p:cNvSpPr>
-            <a:spLocks noGrp="1"/>
-          </p:cNvSpPr>
-          <p:nvPr>
-            <p:ph type="title"/>
-          </p:nvPr>
-        </p:nvSpPr>
-        <p:spPr>
-          <a:xfrm>
-            <a:off x="812800" y="2440980"/>
-            <a:ext cx="10883392" cy="863600"/>
-          </a:xfrm>
-          <a:prstGeom prst="rect">
-            <a:avLst/>
-          </a:prstGeom>
-          <a:noFill/>
-          <a:ln/>
-        </p:spPr>
-        <p:txBody>
-          <a:bodyPr wrap="square" lIns="0" tIns="0" rIns="0" bIns="0" rtlCol="0" anchor="t">
-            <a:normAutofit/>
-          </a:bodyPr>
-          <a:lstStyle/>
-          <a:p>
-            <a:pPr marL="0" indent="0" algn="l">
-              <a:lnSpc>
-                <a:spcPts val="6600"/>
-              </a:lnSpc>
-              <a:buNone/>
-            </a:pPr>
-            <a:r>
-              <a:rPr lang="en-US" sz="6000" b="1" i="0" dirty="0">
-                <a:solidFill>
-                  <a:srgbClr val="F4F6F5"/>
-                </a:solidFill>
-                <a:latin typeface="Rubik" pitchFamily="34" charset="0"/>
-                <a:ea typeface="Rubik" pitchFamily="34" charset="-122"/>
-                <a:cs typeface="Rubik" pitchFamily="34" charset="-120"/>
-              </a:rPr>
-              <a:t>Merci</a:t>
-            </a:r>
-            <a:endParaRPr lang="en-US" sz="6000" dirty="0"/>
-          </a:p>
-        </p:txBody>
-      </p:sp>
-      <p:sp>
-        <p:nvSpPr>
-          <p:cNvPr id="4" name="Text 2"/>
-          <p:cNvSpPr/>
-          <p:nvPr/>
-        </p:nvSpPr>
-        <p:spPr>
-          <a:xfrm>
-            <a:off x="812800" y="3431580"/>
-            <a:ext cx="10883392" cy="452090"/>
-          </a:xfrm>
-          <a:prstGeom prst="rect">
-            <a:avLst/>
-          </a:prstGeom>
-          <a:noFill/>
-          <a:ln/>
-        </p:spPr>
-        <p:txBody>
-          <a:bodyPr wrap="square" lIns="0" tIns="0" rIns="0" bIns="0" rtlCol="0" anchor="t">
-            <a:normAutofit/>
-          </a:bodyPr>
-          <a:lstStyle/>
-          <a:p>
-            <a:pPr marL="0" indent="0" algn="l">
-              <a:lnSpc>
-                <a:spcPts val="3360"/>
-              </a:lnSpc>
-              <a:buNone/>
-            </a:pPr>
-            <a:r>
-              <a:rPr lang="en-US" sz="2400" dirty="0">
-                <a:solidFill>
-                  <a:srgbClr val="7DBE9A"/>
-                </a:solidFill>
-                <a:latin typeface="IBM Plex Sans" pitchFamily="34" charset="0"/>
-                <a:ea typeface="IBM Plex Sans" pitchFamily="34" charset="-122"/>
-                <a:cs typeface="IBM Plex Sans" pitchFamily="34" charset="-120"/>
-              </a:rPr>
-              <a:t>Questions ?</a:t>
-            </a:r>
-            <a:endParaRPr lang="en-US" sz="2400" dirty="0"/>
-          </a:p>
-        </p:txBody>
-      </p:sp>
-      <p:sp>
-        <p:nvSpPr>
-          <p:cNvPr id="5" name="Text 3"/>
-          <p:cNvSpPr/>
-          <p:nvPr/>
-        </p:nvSpPr>
-        <p:spPr>
-          <a:xfrm>
-            <a:off x="812800" y="5435650"/>
-            <a:ext cx="10883392" cy="309860"/>
-          </a:xfrm>
-          <a:prstGeom prst="rect">
-            <a:avLst/>
-          </a:prstGeom>
-          <a:noFill/>
-          <a:ln/>
-        </p:spPr>
-        <p:txBody>
-          <a:bodyPr wrap="square" lIns="0" tIns="0" rIns="0" bIns="0" rtlCol="0" anchor="t">
-            <a:normAutofit/>
-          </a:bodyPr>
-          <a:lstStyle/>
-          <a:p>
-            <a:pPr marL="0" indent="0" algn="l">
-              <a:lnSpc>
-                <a:spcPts val="2240"/>
-              </a:lnSpc>
-              <a:buNone/>
-            </a:pPr>
-            <a:r>
-              <a:rPr lang="en-US" sz="1600" b="1" dirty="0">
-                <a:solidFill>
-                  <a:srgbClr val="F4F6F5"/>
-                </a:solidFill>
-                <a:latin typeface="IBM Plex Sans" pitchFamily="34" charset="0"/>
-                <a:ea typeface="IBM Plex Sans" pitchFamily="34" charset="-122"/>
-                <a:cs typeface="IBM Plex Sans" pitchFamily="34" charset="-120"/>
-              </a:rPr>
-              <a:t>Xiaoqing ZHOU GRANDCOING</a:t>
-            </a:r>
-            <a:endParaRPr lang="en-US" sz="1600" dirty="0"/>
-          </a:p>
-        </p:txBody>
-      </p:sp>
-      <p:sp>
-        <p:nvSpPr>
-          <p:cNvPr id="6" name="Text 4"/>
-          <p:cNvSpPr/>
-          <p:nvPr/>
-        </p:nvSpPr>
-        <p:spPr>
-          <a:xfrm>
-            <a:off x="812800" y="5796310"/>
-            <a:ext cx="10883392" cy="274290"/>
-          </a:xfrm>
-          <a:prstGeom prst="rect">
-            <a:avLst/>
-          </a:prstGeom>
-          <a:noFill/>
-          <a:ln/>
-        </p:spPr>
-        <p:txBody>
-          <a:bodyPr wrap="square" lIns="0" tIns="0" rIns="0" bIns="0" rtlCol="0" anchor="t">
-            <a:normAutofit/>
-          </a:bodyPr>
-          <a:lstStyle/>
-          <a:p>
-            <a:pPr>
-              <a:lnSpc>
-                <a:spcPts val="1960"/>
-              </a:lnSpc>
-            </a:pPr>
-            <a:r>
-              <a:rPr lang="en-US" sz="1400" dirty="0" err="1">
-                <a:solidFill>
-                  <a:srgbClr val="BFD8D5"/>
-                </a:solidFill>
-                <a:latin typeface="IBM Plex Sans" pitchFamily="34" charset="0"/>
-              </a:rPr>
-              <a:t>Portefolio</a:t>
-            </a:r>
-            <a:r>
-              <a:rPr lang="en-US" sz="1400" dirty="0">
-                <a:solidFill>
-                  <a:srgbClr val="BFD8D5"/>
-                </a:solidFill>
-                <a:latin typeface="IBM Plex Sans" pitchFamily="34" charset="0"/>
-              </a:rPr>
-              <a:t> : https://xiaoqinggdc.github.io/</a:t>
-            </a:r>
-            <a:endParaRPr lang="en-US" sz="1400" dirty="0"/>
           </a:p>
         </p:txBody>
       </p:sp>
@@ -20384,7 +18766,7 @@
         <p:spPr>
           <a:xfrm>
             <a:off x="812800" y="4421932"/>
-            <a:ext cx="10566400" cy="939800"/>
+            <a:ext cx="10566400" cy="1600448"/>
           </a:xfrm>
           <a:prstGeom prst="roundRect">
             <a:avLst>
@@ -20435,8 +18817,8 @@
         </p:nvSpPr>
         <p:spPr>
           <a:xfrm>
-            <a:off x="1524000" y="4625132"/>
-            <a:ext cx="9626600" cy="558800"/>
+            <a:off x="1524000" y="4739432"/>
+            <a:ext cx="9626600" cy="933450"/>
           </a:xfrm>
           <a:prstGeom prst="rect">
             <a:avLst/>
@@ -20446,71 +18828,58 @@
         </p:spPr>
         <p:txBody>
           <a:bodyPr wrap="square" lIns="0" tIns="0" rIns="0" bIns="0" rtlCol="0" anchor="t">
-            <a:normAutofit fontScale="92500"/>
-          </a:bodyPr>
-          <a:lstStyle/>
-          <a:p>
-            <a:pPr marL="0" indent="0" algn="l">
-              <a:lnSpc>
-                <a:spcPts val="2100"/>
-              </a:lnSpc>
-              <a:buNone/>
-            </a:pPr>
-            <a:r>
-              <a:rPr lang="fr-FR" sz="1500" dirty="0">
-                <a:solidFill>
-                  <a:srgbClr val="F4F6F5"/>
-                </a:solidFill>
-                <a:latin typeface="IBM Plex Sans" pitchFamily="34" charset="0"/>
-                <a:ea typeface="IBM Plex Sans" pitchFamily="34" charset="-122"/>
-                <a:cs typeface="IBM Plex Sans" pitchFamily="34" charset="-120"/>
+            <a:normAutofit/>
+          </a:bodyPr>
+          <a:lstStyle/>
+          <a:p>
+            <a:r>
+              <a:rPr lang="fr-FR" sz="1600" dirty="0">
+                <a:solidFill>
+                  <a:schemeClr val="bg1"/>
+                </a:solidFill>
               </a:rPr>
               <a:t>Le lien direct </a:t>
             </a:r>
             <a:r>
-              <a:rPr lang="fr-FR" sz="1500" b="1" dirty="0">
-                <a:solidFill>
-                  <a:srgbClr val="F4F6F5"/>
-                </a:solidFill>
-                <a:latin typeface="IBM Plex Sans" pitchFamily="34" charset="0"/>
-                <a:ea typeface="IBM Plex Sans" pitchFamily="34" charset="-122"/>
-                <a:cs typeface="IBM Plex Sans" pitchFamily="34" charset="-120"/>
+              <a:rPr lang="fr-FR" sz="1600" b="1" dirty="0">
+                <a:solidFill>
+                  <a:schemeClr val="bg1"/>
+                </a:solidFill>
               </a:rPr>
               <a:t>prix fournisseur → marge</a:t>
             </a:r>
             <a:r>
-              <a:rPr lang="fr-FR" sz="1500" dirty="0">
-                <a:solidFill>
-                  <a:srgbClr val="F4F6F5"/>
-                </a:solidFill>
-                <a:latin typeface="IBM Plex Sans" pitchFamily="34" charset="0"/>
-                <a:ea typeface="IBM Plex Sans" pitchFamily="34" charset="-122"/>
-                <a:cs typeface="IBM Plex Sans" pitchFamily="34" charset="-120"/>
+              <a:rPr lang="fr-FR" sz="1600" dirty="0">
+                <a:solidFill>
+                  <a:schemeClr val="bg1"/>
+                </a:solidFill>
               </a:rPr>
               <a:t> n’a été mesuré que sur les </a:t>
             </a:r>
             <a:r>
-              <a:rPr lang="fr-FR" sz="1500" b="1" dirty="0">
-                <a:solidFill>
-                  <a:srgbClr val="F4F6F5"/>
-                </a:solidFill>
-                <a:latin typeface="IBM Plex Sans" pitchFamily="34" charset="0"/>
-                <a:ea typeface="IBM Plex Sans" pitchFamily="34" charset="-122"/>
-                <a:cs typeface="IBM Plex Sans" pitchFamily="34" charset="-120"/>
+              <a:rPr lang="fr-FR" sz="1600" b="1" dirty="0">
+                <a:solidFill>
+                  <a:schemeClr val="bg1"/>
+                </a:solidFill>
               </a:rPr>
               <a:t>76 produits en achat-revente directe</a:t>
             </a:r>
             <a:r>
-              <a:rPr lang="fr-FR" sz="1500" dirty="0">
-                <a:solidFill>
-                  <a:srgbClr val="F4F6F5"/>
-                </a:solidFill>
-                <a:latin typeface="IBM Plex Sans" pitchFamily="34" charset="0"/>
-                <a:ea typeface="IBM Plex Sans" pitchFamily="34" charset="-122"/>
-                <a:cs typeface="IBM Plex Sans" pitchFamily="34" charset="-120"/>
-              </a:rPr>
-              <a:t>. Pour les produits fabriqués en interne, la marge n’a pas été calculée : le jeu de données ne contient pas les nomenclatures.</a:t>
-            </a:r>
+              <a:rPr lang="fr-FR" sz="1600" dirty="0">
+                <a:solidFill>
+                  <a:schemeClr val="bg1"/>
+                </a:solidFill>
+              </a:rPr>
+              <a:t>. Pour les produits fabriqués en interne, la marge est calculée au coût standard, mais l’impact des prix fournisseurs ne peut pas être tracé : le jeu de données ne contient pas les nomenclatures.</a:t>
+            </a:r>
+            <a:endParaRPr lang="fr-FR" sz="1500" dirty="0">
+              <a:solidFill>
+                <a:schemeClr val="bg1"/>
+              </a:solidFill>
+              <a:latin typeface="IBM Plex Sans" pitchFamily="34" charset="0"/>
+              <a:ea typeface="IBM Plex Sans" pitchFamily="34" charset="-122"/>
+              <a:cs typeface="IBM Plex Sans" pitchFamily="34" charset="-120"/>
+            </a:endParaRPr>
           </a:p>
         </p:txBody>
       </p:sp>
@@ -21761,7 +20130,7 @@
                 <a:ea typeface="IBM Plex Sans" pitchFamily="34" charset="-122"/>
                 <a:cs typeface="IBM Plex Sans" pitchFamily="34" charset="-120"/>
               </a:rPr>
-              <a:t>Vendor_segments</a:t>
+              <a:t>Vendorsegments</a:t>
             </a:r>
             <a:r>
               <a:rPr lang="en-US" sz="1300" dirty="0">
@@ -21772,7 +20141,29 @@
                 <a:ea typeface="IBM Plex Sans" pitchFamily="34" charset="-122"/>
                 <a:cs typeface="IBM Plex Sans" pitchFamily="34" charset="-120"/>
               </a:rPr>
-              <a:t> ML</a:t>
+              <a:t> </a:t>
+            </a:r>
+            <a:r>
+              <a:rPr lang="fr-FR" sz="1300" dirty="0">
+                <a:solidFill>
+                  <a:srgbClr val="1F2A2E"/>
+                </a:solidFill>
+                <a:latin typeface="IBM Plex Sans" pitchFamily="34" charset="0"/>
+                <a:ea typeface="IBM Plex Sans" pitchFamily="34" charset="-122"/>
+                <a:cs typeface="IBM Plex Sans" pitchFamily="34" charset="-120"/>
+              </a:rPr>
+              <a:t>(</a:t>
+            </a:r>
+            <a:r>
+              <a:rPr lang="en-US" sz="1300" dirty="0">
+                <a:solidFill>
+                  <a:srgbClr val="1F2A2E"/>
+                </a:solidFill>
+                <a:latin typeface="IBM Plex Sans" pitchFamily="34" charset="0"/>
+                <a:ea typeface="IBM Plex Sans" pitchFamily="34" charset="-122"/>
+                <a:cs typeface="IBM Plex Sans" pitchFamily="34" charset="-120"/>
+              </a:rPr>
+              <a:t>ML)</a:t>
             </a:r>
             <a:endParaRPr lang="en-US" sz="1300" dirty="0"/>
           </a:p>
@@ -24835,99 +23226,9 @@
           </a:bodyPr>
           <a:lstStyle/>
           <a:p>
-            <a:pPr marL="0" indent="0" algn="l">
-              <a:lnSpc>
-                <a:spcPts val="1680"/>
-              </a:lnSpc>
-              <a:buNone/>
-            </a:pPr>
-            <a:r>
-              <a:rPr lang="en-US" sz="1200" dirty="0">
-                <a:solidFill>
-                  <a:srgbClr val="4A5A61"/>
-                </a:solidFill>
-                <a:latin typeface="IBM Plex Sans" pitchFamily="34" charset="0"/>
-                <a:ea typeface="IBM Plex Sans" pitchFamily="34" charset="-122"/>
-                <a:cs typeface="IBM Plex Sans" pitchFamily="34" charset="-120"/>
-              </a:rPr>
-              <a:t>Top 10 fournisseurs, segmentation des 104 fournisseurs, </a:t>
-            </a:r>
-            <a:r>
-              <a:rPr lang="en-US" sz="1200" dirty="0" err="1">
-                <a:solidFill>
-                  <a:srgbClr val="4A5A61"/>
-                </a:solidFill>
-                <a:latin typeface="IBM Plex Sans" pitchFamily="34" charset="0"/>
-                <a:ea typeface="IBM Plex Sans" pitchFamily="34" charset="-122"/>
-                <a:cs typeface="IBM Plex Sans" pitchFamily="34" charset="-120"/>
-              </a:rPr>
-              <a:t>montant</a:t>
-            </a:r>
-            <a:r>
-              <a:rPr lang="en-US" sz="1200" dirty="0">
-                <a:solidFill>
-                  <a:srgbClr val="4A5A61"/>
-                </a:solidFill>
-                <a:latin typeface="IBM Plex Sans" pitchFamily="34" charset="0"/>
-                <a:ea typeface="IBM Plex Sans" pitchFamily="34" charset="-122"/>
-                <a:cs typeface="IBM Plex Sans" pitchFamily="34" charset="-120"/>
-              </a:rPr>
-              <a:t> </a:t>
-            </a:r>
-            <a:r>
-              <a:rPr lang="en-US" sz="1200" dirty="0" err="1">
-                <a:solidFill>
-                  <a:srgbClr val="4A5A61"/>
-                </a:solidFill>
-                <a:latin typeface="IBM Plex Sans" pitchFamily="34" charset="0"/>
-                <a:ea typeface="IBM Plex Sans" pitchFamily="34" charset="-122"/>
-                <a:cs typeface="IBM Plex Sans" pitchFamily="34" charset="-120"/>
-              </a:rPr>
-              <a:t>d’achat</a:t>
-            </a:r>
-            <a:r>
-              <a:rPr lang="en-US" sz="1200" dirty="0">
-                <a:solidFill>
-                  <a:srgbClr val="4A5A61"/>
-                </a:solidFill>
-                <a:latin typeface="IBM Plex Sans" pitchFamily="34" charset="0"/>
-                <a:ea typeface="IBM Plex Sans" pitchFamily="34" charset="-122"/>
-                <a:cs typeface="IBM Plex Sans" pitchFamily="34" charset="-120"/>
-              </a:rPr>
-              <a:t>  vs taux de </a:t>
-            </a:r>
-            <a:r>
-              <a:rPr lang="en-US" sz="1200" dirty="0" err="1">
-                <a:solidFill>
-                  <a:srgbClr val="4A5A61"/>
-                </a:solidFill>
-                <a:latin typeface="IBM Plex Sans" pitchFamily="34" charset="0"/>
-                <a:ea typeface="IBM Plex Sans" pitchFamily="34" charset="-122"/>
-                <a:cs typeface="IBM Plex Sans" pitchFamily="34" charset="-120"/>
-              </a:rPr>
-              <a:t>rejet</a:t>
-            </a:r>
-            <a:r>
-              <a:rPr lang="en-US" sz="1200" dirty="0">
-                <a:solidFill>
-                  <a:srgbClr val="4A5A61"/>
-                </a:solidFill>
-                <a:latin typeface="IBM Plex Sans" pitchFamily="34" charset="0"/>
-                <a:ea typeface="IBM Plex Sans" pitchFamily="34" charset="-122"/>
-                <a:cs typeface="IBM Plex Sans" pitchFamily="34" charset="-120"/>
-              </a:rPr>
-              <a:t>,  Évolution mensuelle des </a:t>
-            </a:r>
-            <a:r>
-              <a:rPr lang="en-US" sz="1200" dirty="0" err="1">
-                <a:solidFill>
-                  <a:srgbClr val="4A5A61"/>
-                </a:solidFill>
-                <a:latin typeface="IBM Plex Sans" pitchFamily="34" charset="0"/>
-                <a:ea typeface="IBM Plex Sans" pitchFamily="34" charset="-122"/>
-                <a:cs typeface="IBM Plex Sans" pitchFamily="34" charset="-120"/>
-              </a:rPr>
-              <a:t>achats</a:t>
+            <a:r>
+              <a:rPr lang="fr-FR" sz="1200" dirty="0"/>
+              <a:t>Top 10 fournisseurs, segmentation des 104 fournisseurs, montant d’achat vs taux de rejet, évolution mensuelle des achats</a:t>
             </a:r>
             <a:endParaRPr lang="en-US" sz="1200" dirty="0"/>
           </a:p>
@@ -25973,7 +24274,7 @@
 
 <file path=ppt/webextensions/taskpanes.xml><?xml version="1.0" encoding="utf-8"?>
 <wetp:taskpanes xmlns:wetp="http://schemas.microsoft.com/office/webextensions/taskpanes/2010/11">
-  <wetp:taskpane dockstate="right" visibility="0" width="700" row="4">
+  <wetp:taskpane dockstate="right" visibility="0" width="525" row="0">
     <wetp:webextensionref xmlns:r="http://schemas.openxmlformats.org/officeDocument/2006/relationships" r:id="rId1"/>
   </wetp:taskpane>
 </wetp:taskpanes>

--- a/presentation/AdventureWorks_Soutenance.pptx
+++ b/presentation/AdventureWorks_Soutenance.pptx
@@ -15532,7 +15532,7 @@
               <a:buNone/>
             </a:pPr>
             <a:r>
-              <a:rPr lang="en-US" sz="3200" b="1" i="0" dirty="0">
+              <a:rPr lang="en-US" sz="3200" b="1" i="0" dirty="0" err="1">
                 <a:solidFill>
                   <a:srgbClr val="1F2A2E"/>
                 </a:solidFill>
@@ -15540,7 +15540,18 @@
                 <a:ea typeface="Rubik" pitchFamily="34" charset="-122"/>
                 <a:cs typeface="Rubik" pitchFamily="34" charset="-120"/>
               </a:rPr>
-              <a:t>AdventureWorks 2025 : 15 tables, 3 domaines</a:t>
+              <a:t>AdventureWorks</a:t>
+            </a:r>
+            <a:r>
+              <a:rPr lang="en-US" sz="3200" b="1" i="0" dirty="0">
+                <a:solidFill>
+                  <a:srgbClr val="1F2A2E"/>
+                </a:solidFill>
+                <a:latin typeface="Rubik" pitchFamily="34" charset="0"/>
+                <a:ea typeface="Rubik" pitchFamily="34" charset="-122"/>
+                <a:cs typeface="Rubik" pitchFamily="34" charset="-120"/>
+              </a:rPr>
+              <a:t> 2025 : 15 tables, 3 domaines</a:t>
             </a:r>
             <a:endParaRPr lang="en-US" sz="3200" dirty="0"/>
           </a:p>
@@ -17536,7 +17547,7 @@
                 <a:ea typeface="IBM Plex Sans" pitchFamily="34" charset="-122"/>
                 <a:cs typeface="IBM Plex Sans" pitchFamily="34" charset="-120"/>
               </a:rPr>
-              <a:t>13 tables, DAX, 4 pages</a:t>
+              <a:t>15 tables, DAX, 4 pages</a:t>
             </a:r>
           </a:p>
         </p:txBody>
